--- a/slides/00-setup.pptx
+++ b/slides/00-setup.pptx
@@ -646,91 +646,91 @@
 </file>
 
 <file path=ppt/notesSlides/notesSlide11.xml><?xml version="1.0" encoding="utf-8"?>
-<p:notes xmlns:a="http://schemas.openxmlformats.org/drawingml/2006/main" xmlns:r="http://schemas.openxmlformats.org/officeDocument/2006/relationships" xmlns:p="http://schemas.openxmlformats.org/presentationml/2006/main">
-  <p:cSld>
-    <p:spTree>
-      <p:nvGrpSpPr>
-        <p:cNvPr id="1" name=""/>
-        <p:cNvGrpSpPr/>
-        <p:nvPr/>
-      </p:nvGrpSpPr>
-      <p:grpSpPr>
-        <a:xfrm>
-          <a:off x="0" y="0"/>
-          <a:ext cx="0" cy="0"/>
-          <a:chOff x="0" y="0"/>
-          <a:chExt cx="0" cy="0"/>
-        </a:xfrm>
-      </p:grpSpPr>
-      <p:sp>
-        <p:nvSpPr>
-          <p:cNvPr id="2" name="Slide Image Placeholder 1"/>
-          <p:cNvSpPr>
-            <a:spLocks noGrp="1" noRot="1" noChangeAspect="1"/>
-          </p:cNvSpPr>
-          <p:nvPr>
-            <p:ph type="sldImg"/>
-          </p:nvPr>
-        </p:nvSpPr>
-        <p:spPr/>
-      </p:sp>
-      <p:sp>
-        <p:nvSpPr>
-          <p:cNvPr id="3" name="Notes Placeholder 2"/>
-          <p:cNvSpPr>
-            <a:spLocks noGrp="1"/>
-          </p:cNvSpPr>
-          <p:nvPr>
-            <p:ph type="body" idx="1"/>
-          </p:nvPr>
-        </p:nvSpPr>
-        <p:spPr/>
-        <p:txBody>
-          <a:bodyPr/>
-          <a:lstStyle/>
-          <a:p>
-            <a:r>
-              <a:rPr lang="en-US" dirty="0"/>
-              <a:t>Terminal runs commands; the prompt box sends requests to the agent. Run the four version checks. Each should print a version number. On Windows, if npm fails because running scripts is disabled, use npm.cmd instead. The GitHub CLI has its own sign-in, separate from the app. It must use the account that owns your fork, because the setup script creates items there. If needed, run gh auth login, choose GitHub.com and Login with a web browser, then check again.</a:t>
-            </a:r>
-            <a:endParaRPr lang="en-US" dirty="0"/>
-          </a:p>
-        </p:txBody>
-      </p:sp>
-      <p:sp>
-        <p:nvSpPr>
-          <p:cNvPr id="4" name="Slide Number Placeholder 3"/>
-          <p:cNvSpPr>
-            <a:spLocks noGrp="1"/>
-          </p:cNvSpPr>
-          <p:nvPr>
-            <p:ph type="sldNum" sz="quarter" idx="10"/>
-          </p:nvPr>
-        </p:nvSpPr>
-        <p:spPr/>
-        <p:txBody>
-          <a:bodyPr/>
-          <a:lstStyle/>
-          <a:p>
-            <a:fld id="{F7021451-1387-4CA6-816F-3879F97B5CBC}" type="slidenum">
-              <a:rPr lang="en-US"/>
-              <a:t>11</a:t>
-            </a:fld>
-            <a:endParaRPr lang="en-US"/>
-          </a:p>
-        </p:txBody>
-      </p:sp>
-    </p:spTree>
-    <p:extLst>
-      <p:ext uri="{BB962C8B-B14F-4D97-AF65-F5344CB8AC3E}">
-        <p14:creationId xmlns:p14="http://schemas.microsoft.com/office/powerpoint/2010/main" val="1024086991"/>
-      </p:ext>
-    </p:extLst>
-  </p:cSld>
-  <p:clrMapOvr>
-    <a:masterClrMapping/>
-  </p:clrMapOvr>
-</p:notes>
+<ns0:notes xmlns:ns0="http://schemas.openxmlformats.org/presentationml/2006/main" xmlns:ns1="http://schemas.openxmlformats.org/drawingml/2006/main" xmlns:ns2="http://schemas.microsoft.com/office/powerpoint/2010/main">
+  <ns0:cSld>
+    <ns0:spTree>
+      <ns0:nvGrpSpPr>
+        <ns0:cNvPr id="1" name=""/>
+        <ns0:cNvGrpSpPr/>
+        <ns0:nvPr/>
+      </ns0:nvGrpSpPr>
+      <ns0:grpSpPr>
+        <ns1:xfrm>
+          <ns1:off x="0" y="0"/>
+          <ns1:ext cx="0" cy="0"/>
+          <ns1:chOff x="0" y="0"/>
+          <ns1:chExt cx="0" cy="0"/>
+        </ns1:xfrm>
+      </ns0:grpSpPr>
+      <ns0:sp>
+        <ns0:nvSpPr>
+          <ns0:cNvPr id="2" name="Slide Image Placeholder 1"/>
+          <ns0:cNvSpPr>
+            <ns1:spLocks noGrp="1" noRot="1" noChangeAspect="1"/>
+          </ns0:cNvSpPr>
+          <ns0:nvPr>
+            <ns0:ph type="sldImg"/>
+          </ns0:nvPr>
+        </ns0:nvSpPr>
+        <ns0:spPr/>
+      </ns0:sp>
+      <ns0:sp>
+        <ns0:nvSpPr>
+          <ns0:cNvPr id="3" name="Notes Placeholder 2"/>
+          <ns0:cNvSpPr>
+            <ns1:spLocks noGrp="1"/>
+          </ns0:cNvSpPr>
+          <ns0:nvPr>
+            <ns0:ph type="body" idx="1"/>
+          </ns0:nvPr>
+        </ns0:nvSpPr>
+        <ns0:spPr/>
+        <ns0:txBody>
+          <ns1:bodyPr/>
+          <ns1:lstStyle/>
+          <ns1:p>
+            <ns1:r>
+              <ns1:rPr lang="en-US" dirty="0"/>
+              <ns1:t>Open View &gt; Toggle Panel &gt; Terminal. Run the four version checks. Each should print a version number. On Windows, if npm fails because running scripts is disabled, use npm.cmd instead. The GitHub CLI has its own sign-in, separate from the app. It must use the account that owns your fork, because the setup script creates items there. If needed, run gh auth login, choose GitHub.com and Login with a web browser, then check again.</ns1:t>
+            </ns1:r>
+            <ns1:endParaRPr lang="en-US" dirty="0"/>
+          </ns1:p>
+        </ns0:txBody>
+      </ns0:sp>
+      <ns0:sp>
+        <ns0:nvSpPr>
+          <ns0:cNvPr id="4" name="Slide Number Placeholder 3"/>
+          <ns0:cNvSpPr>
+            <ns1:spLocks noGrp="1"/>
+          </ns0:cNvSpPr>
+          <ns0:nvPr>
+            <ns0:ph type="sldNum" sz="quarter" idx="10"/>
+          </ns0:nvPr>
+        </ns0:nvSpPr>
+        <ns0:spPr/>
+        <ns0:txBody>
+          <ns1:bodyPr/>
+          <ns1:lstStyle/>
+          <ns1:p>
+            <ns1:fld id="{F7021451-1387-4CA6-816F-3879F97B5CBC}" type="slidenum">
+              <ns1:rPr lang="en-US"/>
+              <ns1:t>11</ns1:t>
+            </ns1:fld>
+            <ns1:endParaRPr lang="en-US"/>
+          </ns1:p>
+        </ns0:txBody>
+      </ns0:sp>
+    </ns0:spTree>
+    <ns0:extLst>
+      <ns0:ext uri="{BB962C8B-B14F-4D97-AF65-F5344CB8AC3E}">
+        <ns2:creationId val="1024086991"/>
+      </ns0:ext>
+    </ns0:extLst>
+  </ns0:cSld>
+  <ns0:clrMapOvr>
+    <ns1:masterClrMapping/>
+  </ns0:clrMapOvr>
+</ns0:notes>
 </file>
 
 <file path=ppt/notesSlides/notesSlide12.xml><?xml version="1.0" encoding="utf-8"?>
@@ -1526,91 +1526,91 @@
 </file>
 
 <file path=ppt/notesSlides/notesSlide8.xml><?xml version="1.0" encoding="utf-8"?>
-<p:notes xmlns:a="http://schemas.openxmlformats.org/drawingml/2006/main" xmlns:r="http://schemas.openxmlformats.org/officeDocument/2006/relationships" xmlns:p="http://schemas.openxmlformats.org/presentationml/2006/main">
-  <p:cSld>
-    <p:spTree>
-      <p:nvGrpSpPr>
-        <p:cNvPr id="1" name=""/>
-        <p:cNvGrpSpPr/>
-        <p:nvPr/>
-      </p:nvGrpSpPr>
-      <p:grpSpPr>
-        <a:xfrm>
-          <a:off x="0" y="0"/>
-          <a:ext cx="0" cy="0"/>
-          <a:chOff x="0" y="0"/>
-          <a:chExt cx="0" cy="0"/>
-        </a:xfrm>
-      </p:grpSpPr>
-      <p:sp>
-        <p:nvSpPr>
-          <p:cNvPr id="2" name="Slide Image Placeholder 1"/>
-          <p:cNvSpPr>
-            <a:spLocks noGrp="1" noRot="1" noChangeAspect="1"/>
-          </p:cNvSpPr>
-          <p:nvPr>
-            <p:ph type="sldImg"/>
-          </p:nvPr>
-        </p:nvSpPr>
-        <p:spPr/>
-      </p:sp>
-      <p:sp>
-        <p:nvSpPr>
-          <p:cNvPr id="3" name="Notes Placeholder 2"/>
-          <p:cNvSpPr>
-            <a:spLocks noGrp="1"/>
-          </p:cNvSpPr>
-          <p:nvPr>
-            <p:ph type="body" idx="1"/>
-          </p:nvPr>
-        </p:nvSpPr>
-        <p:spPr/>
-        <p:txBody>
-          <a:bodyPr/>
-          <a:lstStyle/>
-          <a:p>
-            <a:r>
-              <a:rPr lang="en-US" dirty="0"/>
-              <a:t>Fork the course repository so you have your own copy to change. In the app, select the plus next to Projects and choose Add GitHub repository. Type copilot-app-for-beginners in the search box and select your fork, the result that starts with your GitHub username, not github/copilot-app-for-beginners. The app clones it and adds the project to the sidebar. If you already have a local clone, use Open folder. If you have the URL, use Clone repository.</a:t>
-            </a:r>
-            <a:endParaRPr lang="en-US" dirty="0"/>
-          </a:p>
-        </p:txBody>
-      </p:sp>
-      <p:sp>
-        <p:nvSpPr>
-          <p:cNvPr id="4" name="Slide Number Placeholder 3"/>
-          <p:cNvSpPr>
-            <a:spLocks noGrp="1"/>
-          </p:cNvSpPr>
-          <p:nvPr>
-            <p:ph type="sldNum" sz="quarter" idx="10"/>
-          </p:nvPr>
-        </p:nvSpPr>
-        <p:spPr/>
-        <p:txBody>
-          <a:bodyPr/>
-          <a:lstStyle/>
-          <a:p>
-            <a:fld id="{F7021451-1387-4CA6-816F-3879F97B5CBC}" type="slidenum">
-              <a:rPr lang="en-US"/>
-              <a:t>8</a:t>
-            </a:fld>
-            <a:endParaRPr lang="en-US"/>
-          </a:p>
-        </p:txBody>
-      </p:sp>
-    </p:spTree>
-    <p:extLst>
-      <p:ext uri="{BB962C8B-B14F-4D97-AF65-F5344CB8AC3E}">
-        <p14:creationId xmlns:p14="http://schemas.microsoft.com/office/powerpoint/2010/main" val="1024086991"/>
-      </p:ext>
-    </p:extLst>
-  </p:cSld>
-  <p:clrMapOvr>
-    <a:masterClrMapping/>
-  </p:clrMapOvr>
-</p:notes>
+<ns0:notes xmlns:ns0="http://schemas.openxmlformats.org/presentationml/2006/main" xmlns:ns1="http://schemas.openxmlformats.org/drawingml/2006/main" xmlns:ns2="http://schemas.microsoft.com/office/powerpoint/2010/main">
+  <ns0:cSld>
+    <ns0:spTree>
+      <ns0:nvGrpSpPr>
+        <ns0:cNvPr id="1" name=""/>
+        <ns0:cNvGrpSpPr/>
+        <ns0:nvPr/>
+      </ns0:nvGrpSpPr>
+      <ns0:grpSpPr>
+        <ns1:xfrm>
+          <ns1:off x="0" y="0"/>
+          <ns1:ext cx="0" cy="0"/>
+          <ns1:chOff x="0" y="0"/>
+          <ns1:chExt cx="0" cy="0"/>
+        </ns1:xfrm>
+      </ns0:grpSpPr>
+      <ns0:sp>
+        <ns0:nvSpPr>
+          <ns0:cNvPr id="2" name="Slide Image Placeholder 1"/>
+          <ns0:cNvSpPr>
+            <ns1:spLocks noGrp="1" noRot="1" noChangeAspect="1"/>
+          </ns0:cNvSpPr>
+          <ns0:nvPr>
+            <ns0:ph type="sldImg"/>
+          </ns0:nvPr>
+        </ns0:nvSpPr>
+        <ns0:spPr/>
+      </ns0:sp>
+      <ns0:sp>
+        <ns0:nvSpPr>
+          <ns0:cNvPr id="3" name="Notes Placeholder 2"/>
+          <ns0:cNvSpPr>
+            <ns1:spLocks noGrp="1"/>
+          </ns0:cNvSpPr>
+          <ns0:nvPr>
+            <ns0:ph type="body" idx="1"/>
+          </ns0:nvPr>
+        </ns0:nvSpPr>
+        <ns0:spPr/>
+        <ns0:txBody>
+          <ns1:bodyPr/>
+          <ns1:lstStyle/>
+          <ns1:p>
+            <ns1:r>
+              <ns1:rPr lang="en-US" dirty="0"/>
+              <ns1:t>Fork the course repository so you have your own copy to change. In the app, select the plus next to Sessions and choose Add GitHub repository. Search for copilot-app-for-beginners, then select your fork, the result that starts with your GitHub username, not github/copilot-app-for-beginners. The app adds it under Sessions. If you already have a local clone, use Open folder. If you have the URL, use Clone repository.</ns1:t>
+            </ns1:r>
+            <ns1:endParaRPr lang="en-US" dirty="0"/>
+          </ns1:p>
+        </ns0:txBody>
+      </ns0:sp>
+      <ns0:sp>
+        <ns0:nvSpPr>
+          <ns0:cNvPr id="4" name="Slide Number Placeholder 3"/>
+          <ns0:cNvSpPr>
+            <ns1:spLocks noGrp="1"/>
+          </ns0:cNvSpPr>
+          <ns0:nvPr>
+            <ns0:ph type="sldNum" sz="quarter" idx="10"/>
+          </ns0:nvPr>
+        </ns0:nvSpPr>
+        <ns0:spPr/>
+        <ns0:txBody>
+          <ns1:bodyPr/>
+          <ns1:lstStyle/>
+          <ns1:p>
+            <ns1:fld id="{F7021451-1387-4CA6-816F-3879F97B5CBC}" type="slidenum">
+              <ns1:rPr lang="en-US"/>
+              <ns1:t>8</ns1:t>
+            </ns1:fld>
+            <ns1:endParaRPr lang="en-US"/>
+          </ns1:p>
+        </ns0:txBody>
+      </ns0:sp>
+    </ns0:spTree>
+    <ns0:extLst>
+      <ns0:ext uri="{BB962C8B-B14F-4D97-AF65-F5344CB8AC3E}">
+        <ns2:creationId val="1024086991"/>
+      </ns0:ext>
+    </ns0:extLst>
+  </ns0:cSld>
+  <ns0:clrMapOvr>
+    <ns1:masterClrMapping/>
+  </ns0:clrMapOvr>
+</ns0:notes>
 </file>
 
 <file path=ppt/notesSlides/notesSlide9.xml><?xml version="1.0" encoding="utf-8"?>
@@ -2750,1370 +2750,1370 @@
 </file>
 
 <file path=ppt/slides/slide11.xml><?xml version="1.0" encoding="utf-8"?>
-<p:sld xmlns:a="http://schemas.openxmlformats.org/drawingml/2006/main" xmlns:r="http://schemas.openxmlformats.org/officeDocument/2006/relationships" xmlns:p="http://schemas.openxmlformats.org/presentationml/2006/main">
-  <p:cSld name="Slide 11">
-    <p:bg>
-      <p:bgPr>
-        <a:solidFill>
-          <a:srgbClr val="FFFFFF"/>
-        </a:solidFill>
-      </p:bgPr>
-    </p:bg>
-    <p:spTree>
-      <p:nvGrpSpPr>
-        <p:cNvPr id="1" name=""/>
-        <p:cNvGrpSpPr/>
-        <p:nvPr/>
-      </p:nvGrpSpPr>
-      <p:grpSpPr>
-        <a:xfrm>
-          <a:off x="0" y="0"/>
-          <a:ext cx="0" cy="0"/>
-          <a:chOff x="0" y="0"/>
-          <a:chExt cx="0" cy="0"/>
-        </a:xfrm>
-      </p:grpSpPr>
-      <p:pic>
-        <p:nvPicPr>
-          <p:cNvPr id="2" name="Image 0" descr="">
-            <a:extLst>
-              <a:ext uri="{C183D7F6-B498-43B3-948B-1728B52AA6E4}">
-                <adec:decorative xmlns:adec="http://schemas.microsoft.com/office/drawing/2017/decorative" val="1"/>
-              </a:ext>
-            </a:extLst>
-          </p:cNvPr>
-          <p:cNvPicPr>
-            <a:picLocks noChangeAspect="1"/>
-          </p:cNvPicPr>
-          <p:nvPr/>
-        </p:nvPicPr>
-        <p:blipFill>
-          <a:blip r:embed="rId1"/>
-          <a:stretch>
-            <a:fillRect/>
-          </a:stretch>
-        </p:blipFill>
-        <p:spPr>
-          <a:xfrm>
-            <a:off x="6349901" y="0"/>
-            <a:ext cx="2793950" cy="1308050"/>
-          </a:xfrm>
-          <a:prstGeom prst="rect">
-            <a:avLst/>
-          </a:prstGeom>
-        </p:spPr>
-      </p:pic>
-      <p:sp>
-        <p:nvSpPr>
-          <p:cNvPr id="3" name="Text 0"/>
-          <p:cNvSpPr/>
-          <p:nvPr/>
-        </p:nvSpPr>
-        <p:spPr>
-          <a:xfrm>
-            <a:off x="7340501" y="177701"/>
-            <a:ext cx="1168301" cy="279350"/>
-          </a:xfrm>
-          <a:prstGeom prst="roundRect">
-            <a:avLst>
-              <a:gd name="adj" fmla="val 22731"/>
-            </a:avLst>
-          </a:prstGeom>
-          <a:solidFill>
-            <a:srgbClr val="1A7F37"/>
-          </a:solidFill>
-          <a:ln/>
-        </p:spPr>
-        <p:txBody>
-          <a:bodyPr wrap="square" rtlCol="0" anchor="ctr"/>
-          <a:lstStyle/>
-          <a:p>
-            <a:pPr indent="0" marL="0">
-              <a:buNone/>
-            </a:pPr>
-            <a:endParaRPr lang="en-US" dirty="0"/>
-          </a:p>
-        </p:txBody>
-      </p:sp>
-      <p:sp>
-        <p:nvSpPr>
-          <p:cNvPr id="4" name="Text 1"/>
-          <p:cNvSpPr/>
-          <p:nvPr/>
-        </p:nvSpPr>
-        <p:spPr>
-          <a:xfrm>
-            <a:off x="7461041" y="231577"/>
-            <a:ext cx="927071" cy="171450"/>
-          </a:xfrm>
-          <a:prstGeom prst="rect">
-            <a:avLst/>
-          </a:prstGeom>
-          <a:noFill/>
-          <a:ln/>
-        </p:spPr>
-        <p:txBody>
-          <a:bodyPr wrap="square" lIns="0" tIns="0" rIns="0" bIns="0" rtlCol="0" anchor="t"/>
-          <a:lstStyle/>
-          <a:p>
-            <a:pPr algn="ctr" indent="0" marL="0">
-              <a:buNone/>
-            </a:pPr>
-            <a:r>
-              <a:rPr lang="en-US" sz="1150" b="1" dirty="0">
-                <a:solidFill>
-                  <a:srgbClr val="FFFFFF"/>
-                </a:solidFill>
-                <a:latin typeface="Arial" pitchFamily="34" charset="0"/>
-                <a:ea typeface="Arial" pitchFamily="34" charset="-122"/>
-                <a:cs typeface="Arial" pitchFamily="34" charset="-120"/>
-              </a:rPr>
-              <a:t>CHAPTER 00</a:t>
-            </a:r>
-            <a:endParaRPr lang="en-US" sz="1150" dirty="0"/>
-          </a:p>
-        </p:txBody>
-      </p:sp>
-      <p:pic>
-        <p:nvPicPr>
-          <p:cNvPr id="5" name="Image 1" descr="Open this chapter on GitHub">
-            <a:hlinkClick r:id="rId3" tooltip="https://github.com/github/copilot-app-for-beginners/tree/main/00-setup"/>
-          </p:cNvPr>
-          <p:cNvPicPr>
-            <a:picLocks noChangeAspect="1"/>
-          </p:cNvPicPr>
-          <p:nvPr/>
-        </p:nvPicPr>
-        <p:blipFill>
-          <a:blip r:embed="rId2"/>
-          <a:stretch>
-            <a:fillRect/>
-          </a:stretch>
-        </p:blipFill>
-        <p:spPr>
-          <a:xfrm>
-            <a:off x="8610600" y="165050"/>
-            <a:ext cx="304800" cy="304800"/>
-          </a:xfrm>
-          <a:prstGeom prst="rect">
-            <a:avLst/>
-          </a:prstGeom>
-        </p:spPr>
-      </p:pic>
-      <p:sp>
-        <p:nvSpPr>
-          <p:cNvPr id="6" name="Text 2"/>
-          <p:cNvSpPr/>
-          <p:nvPr/>
-        </p:nvSpPr>
-        <p:spPr>
-          <a:xfrm>
-            <a:off x="507950" y="381000"/>
-            <a:ext cx="8161020" cy="190500"/>
-          </a:xfrm>
-          <a:prstGeom prst="rect">
-            <a:avLst/>
-          </a:prstGeom>
-          <a:noFill/>
-          <a:ln/>
-        </p:spPr>
-        <p:txBody>
-          <a:bodyPr wrap="square" lIns="0" tIns="0" rIns="0" bIns="0" rtlCol="0" anchor="t"/>
-          <a:lstStyle/>
-          <a:p>
-            <a:pPr algn="l" indent="0" marL="0">
-              <a:buNone/>
-            </a:pPr>
-            <a:r>
-              <a:rPr lang="en-US" sz="1250" b="1" dirty="0">
-                <a:solidFill>
-                  <a:srgbClr val="1A7F37"/>
-                </a:solidFill>
-                <a:latin typeface="Arial" pitchFamily="34" charset="0"/>
-                <a:ea typeface="Arial" pitchFamily="34" charset="-122"/>
-                <a:cs typeface="Arial" pitchFamily="34" charset="-120"/>
-              </a:rPr>
-              <a:t>SOUNDCHECK</a:t>
-            </a:r>
-            <a:endParaRPr lang="en-US" sz="1250" dirty="0"/>
-          </a:p>
-        </p:txBody>
-      </p:sp>
-      <p:sp>
-        <p:nvSpPr>
-          <p:cNvPr id="7" name="Text 3"/>
-          <p:cNvSpPr/>
-          <p:nvPr/>
-        </p:nvSpPr>
-        <p:spPr>
-          <a:xfrm>
-            <a:off x="507950" y="622250"/>
-            <a:ext cx="8161020" cy="419100"/>
-          </a:xfrm>
-          <a:prstGeom prst="rect">
-            <a:avLst/>
-          </a:prstGeom>
-          <a:noFill/>
-          <a:ln/>
-        </p:spPr>
-        <p:txBody>
-          <a:bodyPr wrap="square" lIns="0" tIns="0" rIns="0" bIns="0" rtlCol="0" anchor="t"/>
-          <a:lstStyle/>
-          <a:p>
-            <a:pPr algn="l" indent="0" marL="0">
-              <a:lnSpc>
-                <a:spcPts val="3300"/>
-              </a:lnSpc>
-              <a:spcBef>
-                <a:spcPts val="400"/>
-              </a:spcBef>
-              <a:buNone/>
-            </a:pPr>
-            <a:r>
-              <a:rPr lang="en-US" sz="2800" b="1" dirty="0">
-                <a:solidFill>
-                  <a:srgbClr val="1F2328"/>
-                </a:solidFill>
-                <a:latin typeface="Arial" pitchFamily="34" charset="0"/>
-                <a:ea typeface="Arial" pitchFamily="34" charset="-122"/>
-                <a:cs typeface="Arial" pitchFamily="34" charset="-120"/>
-              </a:rPr>
-              <a:t>Check your tools in Terminal</a:t>
-            </a:r>
-            <a:endParaRPr lang="en-US" sz="2800" dirty="0"/>
-          </a:p>
-        </p:txBody>
-      </p:sp>
-      <p:sp>
-        <p:nvSpPr>
-          <p:cNvPr id="8" name="Text 4"/>
-          <p:cNvSpPr/>
-          <p:nvPr/>
-        </p:nvSpPr>
-        <p:spPr>
-          <a:xfrm>
-            <a:off x="507950" y="1104751"/>
-            <a:ext cx="8161020" cy="254050"/>
-          </a:xfrm>
-          <a:prstGeom prst="rect">
-            <a:avLst/>
-          </a:prstGeom>
-          <a:noFill/>
-          <a:ln/>
-        </p:spPr>
-        <p:txBody>
-          <a:bodyPr wrap="square" lIns="0" tIns="0" rIns="0" bIns="0" rtlCol="0" anchor="t"/>
-          <a:lstStyle/>
-          <a:p>
-            <a:pPr algn="l" indent="0" marL="0">
-              <a:lnSpc>
-                <a:spcPts val="2000"/>
-              </a:lnSpc>
-              <a:spcBef>
-                <a:spcPts val="500"/>
-              </a:spcBef>
-              <a:buNone/>
-            </a:pPr>
-            <a:r>
-              <a:rPr lang="en-US" sz="1650" dirty="0">
-                <a:solidFill>
-                  <a:srgbClr val="59636E"/>
-                </a:solidFill>
-                <a:latin typeface="Arial" pitchFamily="34" charset="0"/>
-                <a:ea typeface="Arial" pitchFamily="34" charset="-122"/>
-                <a:cs typeface="Arial" pitchFamily="34" charset="-120"/>
-              </a:rPr>
-              <a:t>Open </a:t>
-            </a:r>
-            <a:pPr algn="l" indent="0" marL="0">
-              <a:lnSpc>
-                <a:spcPts val="2000"/>
-              </a:lnSpc>
-              <a:spcBef>
-                <a:spcPts val="500"/>
-              </a:spcBef>
-              <a:buNone/>
-            </a:pPr>
-            <a:r>
-              <a:rPr lang="en-US" sz="1650" b="1" dirty="0">
-                <a:solidFill>
-                  <a:srgbClr val="59636E"/>
-                </a:solidFill>
-                <a:latin typeface="Arial" pitchFamily="34" charset="0"/>
-                <a:ea typeface="Arial" pitchFamily="34" charset="-122"/>
-                <a:cs typeface="Arial" pitchFamily="34" charset="-120"/>
-              </a:rPr>
-              <a:t>View</a:t>
-            </a:r>
-            <a:pPr algn="l" indent="0" marL="0">
-              <a:lnSpc>
-                <a:spcPts val="2000"/>
-              </a:lnSpc>
-              <a:spcBef>
-                <a:spcPts val="500"/>
-              </a:spcBef>
-              <a:buNone/>
-            </a:pPr>
-            <a:r>
-              <a:rPr lang="en-US" sz="1650" dirty="0">
-                <a:solidFill>
-                  <a:srgbClr val="59636E"/>
-                </a:solidFill>
-                <a:latin typeface="Arial" pitchFamily="34" charset="0"/>
-                <a:ea typeface="Arial" pitchFamily="34" charset="-122"/>
-                <a:cs typeface="Arial" pitchFamily="34" charset="-120"/>
-              </a:rPr>
-              <a:t> &gt; </a:t>
-            </a:r>
-            <a:pPr algn="l" indent="0" marL="0">
-              <a:lnSpc>
-                <a:spcPts val="2000"/>
-              </a:lnSpc>
-              <a:spcBef>
-                <a:spcPts val="500"/>
-              </a:spcBef>
-              <a:buNone/>
-            </a:pPr>
-            <a:r>
-              <a:rPr lang="en-US" sz="1650" b="1" dirty="0">
-                <a:solidFill>
-                  <a:srgbClr val="59636E"/>
-                </a:solidFill>
-                <a:latin typeface="Arial" pitchFamily="34" charset="0"/>
-                <a:ea typeface="Arial" pitchFamily="34" charset="-122"/>
-                <a:cs typeface="Arial" pitchFamily="34" charset="-120"/>
-              </a:rPr>
-              <a:t>Toggle Review Panel</a:t>
-            </a:r>
-            <a:pPr algn="l" indent="0" marL="0">
-              <a:lnSpc>
-                <a:spcPts val="2000"/>
-              </a:lnSpc>
-              <a:spcBef>
-                <a:spcPts val="500"/>
-              </a:spcBef>
-              <a:buNone/>
-            </a:pPr>
-            <a:r>
-              <a:rPr lang="en-US" sz="1650" dirty="0">
-                <a:solidFill>
-                  <a:srgbClr val="59636E"/>
-                </a:solidFill>
-                <a:latin typeface="Arial" pitchFamily="34" charset="0"/>
-                <a:ea typeface="Arial" pitchFamily="34" charset="-122"/>
-                <a:cs typeface="Arial" pitchFamily="34" charset="-120"/>
-              </a:rPr>
-              <a:t> &gt; </a:t>
-            </a:r>
-            <a:pPr algn="l" indent="0" marL="0">
-              <a:lnSpc>
-                <a:spcPts val="2000"/>
-              </a:lnSpc>
-              <a:spcBef>
-                <a:spcPts val="500"/>
-              </a:spcBef>
-              <a:buNone/>
-            </a:pPr>
-            <a:r>
-              <a:rPr lang="en-US" sz="1650" b="1" dirty="0">
-                <a:solidFill>
-                  <a:srgbClr val="59636E"/>
-                </a:solidFill>
-                <a:latin typeface="Arial" pitchFamily="34" charset="0"/>
-                <a:ea typeface="Arial" pitchFamily="34" charset="-122"/>
-                <a:cs typeface="Arial" pitchFamily="34" charset="-120"/>
-              </a:rPr>
-              <a:t>Terminal</a:t>
-            </a:r>
-            <a:pPr algn="l" indent="0" marL="0">
-              <a:lnSpc>
-                <a:spcPts val="2000"/>
-              </a:lnSpc>
-              <a:spcBef>
-                <a:spcPts val="500"/>
-              </a:spcBef>
-              <a:buNone/>
-            </a:pPr>
-            <a:r>
-              <a:rPr lang="en-US" sz="1650" dirty="0">
-                <a:solidFill>
-                  <a:srgbClr val="59636E"/>
-                </a:solidFill>
-                <a:latin typeface="Arial" pitchFamily="34" charset="0"/>
-                <a:ea typeface="Arial" pitchFamily="34" charset="-122"/>
-                <a:cs typeface="Arial" pitchFamily="34" charset="-120"/>
-              </a:rPr>
-              <a:t>.</a:t>
-            </a:r>
-            <a:endParaRPr lang="en-US" sz="1650" dirty="0"/>
-          </a:p>
-        </p:txBody>
-      </p:sp>
-      <p:sp>
-        <p:nvSpPr>
-          <p:cNvPr id="9" name="Text 5"/>
-          <p:cNvSpPr/>
-          <p:nvPr/>
-        </p:nvSpPr>
-        <p:spPr>
-          <a:xfrm>
-            <a:off x="507950" y="1574750"/>
-            <a:ext cx="3682901" cy="2503884"/>
-          </a:xfrm>
-          <a:prstGeom prst="roundRect">
-            <a:avLst>
-              <a:gd name="adj" fmla="val 4058"/>
-            </a:avLst>
-          </a:prstGeom>
-          <a:solidFill>
-            <a:srgbClr val="F6F8FA"/>
-          </a:solidFill>
-          <a:ln w="9525">
-            <a:solidFill>
-              <a:srgbClr val="D1D9E0"/>
-            </a:solidFill>
-          </a:ln>
-        </p:spPr>
-        <p:txBody>
-          <a:bodyPr wrap="square" rtlCol="0" anchor="ctr"/>
-          <a:lstStyle/>
-          <a:p>
-            <a:pPr indent="0" marL="0">
-              <a:buNone/>
-            </a:pPr>
-            <a:endParaRPr lang="en-US" dirty="0"/>
-          </a:p>
-        </p:txBody>
-      </p:sp>
-      <p:sp>
-        <p:nvSpPr>
-          <p:cNvPr id="10" name="Text 6"/>
-          <p:cNvSpPr/>
-          <p:nvPr/>
-        </p:nvSpPr>
-        <p:spPr>
-          <a:xfrm>
-            <a:off x="517475" y="1584275"/>
-            <a:ext cx="3663851" cy="238125"/>
-          </a:xfrm>
-          <a:prstGeom prst="rect">
-            <a:avLst/>
-          </a:prstGeom>
-          <a:solidFill>
-            <a:srgbClr val="EFF2F5"/>
-          </a:solidFill>
-          <a:ln/>
-        </p:spPr>
-        <p:txBody>
-          <a:bodyPr wrap="square" rtlCol="0" anchor="ctr"/>
-          <a:lstStyle/>
-          <a:p>
-            <a:pPr indent="0" marL="0">
-              <a:buNone/>
-            </a:pPr>
-            <a:endParaRPr lang="en-US" dirty="0"/>
-          </a:p>
-        </p:txBody>
-      </p:sp>
-      <p:sp>
-        <p:nvSpPr>
-          <p:cNvPr id="11" name="Shape 7"/>
-          <p:cNvSpPr/>
-          <p:nvPr/>
-        </p:nvSpPr>
-        <p:spPr>
-          <a:xfrm>
-            <a:off x="517475" y="1817638"/>
-            <a:ext cx="3663851" cy="0"/>
-          </a:xfrm>
-          <a:prstGeom prst="line">
-            <a:avLst/>
-          </a:prstGeom>
-          <a:noFill/>
-          <a:ln w="9525">
-            <a:solidFill>
-              <a:srgbClr val="D1D9E0"/>
-            </a:solidFill>
-            <a:prstDash val="solid"/>
-          </a:ln>
-        </p:spPr>
-      </p:sp>
-      <p:sp>
-        <p:nvSpPr>
-          <p:cNvPr id="12" name="Text 8"/>
-          <p:cNvSpPr/>
-          <p:nvPr/>
-        </p:nvSpPr>
-        <p:spPr>
-          <a:xfrm>
-            <a:off x="631775" y="1654076"/>
-            <a:ext cx="88850" cy="88850"/>
-          </a:xfrm>
-          <a:prstGeom prst="roundRect">
-            <a:avLst>
-              <a:gd name="adj" fmla="val 1029150"/>
-            </a:avLst>
-          </a:prstGeom>
-          <a:solidFill>
-            <a:srgbClr val="FF5F57"/>
-          </a:solidFill>
-          <a:ln/>
-        </p:spPr>
-        <p:txBody>
-          <a:bodyPr wrap="square" rtlCol="0" anchor="ctr"/>
-          <a:lstStyle/>
-          <a:p>
-            <a:pPr indent="0" marL="0">
-              <a:buNone/>
-            </a:pPr>
-            <a:endParaRPr lang="en-US" dirty="0"/>
-          </a:p>
-        </p:txBody>
-      </p:sp>
-      <p:sp>
-        <p:nvSpPr>
-          <p:cNvPr id="13" name="Text 9"/>
-          <p:cNvSpPr/>
-          <p:nvPr/>
-        </p:nvSpPr>
-        <p:spPr>
-          <a:xfrm>
-            <a:off x="771376" y="1654076"/>
-            <a:ext cx="88850" cy="88850"/>
-          </a:xfrm>
-          <a:prstGeom prst="roundRect">
-            <a:avLst>
-              <a:gd name="adj" fmla="val 1029150"/>
-            </a:avLst>
-          </a:prstGeom>
-          <a:solidFill>
-            <a:srgbClr val="FEBC2E"/>
-          </a:solidFill>
-          <a:ln/>
-        </p:spPr>
-        <p:txBody>
-          <a:bodyPr wrap="square" rtlCol="0" anchor="ctr"/>
-          <a:lstStyle/>
-          <a:p>
-            <a:pPr indent="0" marL="0">
-              <a:buNone/>
-            </a:pPr>
-            <a:endParaRPr lang="en-US" dirty="0"/>
-          </a:p>
-        </p:txBody>
-      </p:sp>
-      <p:sp>
-        <p:nvSpPr>
-          <p:cNvPr id="14" name="Text 10"/>
-          <p:cNvSpPr/>
-          <p:nvPr/>
-        </p:nvSpPr>
-        <p:spPr>
-          <a:xfrm>
-            <a:off x="910977" y="1654076"/>
-            <a:ext cx="88850" cy="88850"/>
-          </a:xfrm>
-          <a:prstGeom prst="roundRect">
-            <a:avLst>
-              <a:gd name="adj" fmla="val 1029150"/>
-            </a:avLst>
-          </a:prstGeom>
-          <a:solidFill>
-            <a:srgbClr val="28C840"/>
-          </a:solidFill>
-          <a:ln/>
-        </p:spPr>
-        <p:txBody>
-          <a:bodyPr wrap="square" rtlCol="0" anchor="ctr"/>
-          <a:lstStyle/>
-          <a:p>
-            <a:pPr indent="0" marL="0">
-              <a:buNone/>
-            </a:pPr>
-            <a:endParaRPr lang="en-US" dirty="0"/>
-          </a:p>
-        </p:txBody>
-      </p:sp>
-      <p:sp>
-        <p:nvSpPr>
-          <p:cNvPr id="15" name="Text 11"/>
-          <p:cNvSpPr/>
-          <p:nvPr/>
-        </p:nvSpPr>
-        <p:spPr>
-          <a:xfrm>
-            <a:off x="1126778" y="1612850"/>
-            <a:ext cx="715152" cy="171450"/>
-          </a:xfrm>
-          <a:prstGeom prst="rect">
-            <a:avLst/>
-          </a:prstGeom>
-          <a:noFill/>
-          <a:ln/>
-        </p:spPr>
-        <p:txBody>
-          <a:bodyPr wrap="square" lIns="0" tIns="0" rIns="0" bIns="0" rtlCol="0" anchor="t"/>
-          <a:lstStyle/>
-          <a:p>
-            <a:pPr algn="l" indent="0" marL="0">
-              <a:buNone/>
-            </a:pPr>
-            <a:r>
-              <a:rPr lang="en-US" sz="1150" dirty="0">
-                <a:solidFill>
-                  <a:srgbClr val="59636E"/>
-                </a:solidFill>
-                <a:latin typeface="Courier New" pitchFamily="34" charset="0"/>
-                <a:ea typeface="Courier New" pitchFamily="34" charset="-122"/>
-                <a:cs typeface="Courier New" pitchFamily="34" charset="-120"/>
-              </a:rPr>
-              <a:t>Terminal</a:t>
-            </a:r>
-            <a:endParaRPr lang="en-US" sz="1150" dirty="0"/>
-          </a:p>
-        </p:txBody>
-      </p:sp>
-      <p:sp>
-        <p:nvSpPr>
-          <p:cNvPr id="16" name="Text 12"/>
-          <p:cNvSpPr/>
-          <p:nvPr/>
-        </p:nvSpPr>
-        <p:spPr>
-          <a:xfrm>
-            <a:off x="669875" y="1949351"/>
-            <a:ext cx="3426232" cy="238720"/>
-          </a:xfrm>
-          <a:prstGeom prst="rect">
-            <a:avLst/>
-          </a:prstGeom>
-          <a:noFill/>
-          <a:ln/>
-        </p:spPr>
-        <p:txBody>
-          <a:bodyPr wrap="square" lIns="0" tIns="0" rIns="0" bIns="0" rtlCol="0" anchor="t"/>
-          <a:lstStyle/>
-          <a:p>
-            <a:pPr algn="l" indent="0" marL="0">
-              <a:lnSpc>
-                <a:spcPts val="1880"/>
-              </a:lnSpc>
-              <a:buNone/>
-            </a:pPr>
-            <a:r>
-              <a:rPr lang="en-US" sz="1450" b="1" dirty="0">
-                <a:solidFill>
-                  <a:srgbClr val="1A7F37"/>
-                </a:solidFill>
-                <a:latin typeface="Courier New" pitchFamily="34" charset="0"/>
-                <a:ea typeface="Courier New" pitchFamily="34" charset="-122"/>
-                <a:cs typeface="Courier New" pitchFamily="34" charset="-120"/>
-              </a:rPr>
-              <a:t>$</a:t>
-            </a:r>
-            <a:pPr algn="l" indent="0" marL="0">
-              <a:lnSpc>
-                <a:spcPts val="1880"/>
-              </a:lnSpc>
-              <a:buNone/>
-            </a:pPr>
-            <a:r>
-              <a:rPr lang="en-US" sz="1450" dirty="0">
-                <a:solidFill>
-                  <a:srgbClr val="1F2328"/>
-                </a:solidFill>
-                <a:latin typeface="Courier New" pitchFamily="34" charset="0"/>
-                <a:ea typeface="Courier New" pitchFamily="34" charset="-122"/>
-                <a:cs typeface="Courier New" pitchFamily="34" charset="-120"/>
-              </a:rPr>
-              <a:t> git --version</a:t>
-            </a:r>
-            <a:endParaRPr lang="en-US" sz="1450" dirty="0"/>
-          </a:p>
-        </p:txBody>
-      </p:sp>
-      <p:sp>
-        <p:nvSpPr>
-          <p:cNvPr id="17" name="Text 13"/>
-          <p:cNvSpPr/>
-          <p:nvPr/>
-        </p:nvSpPr>
-        <p:spPr>
-          <a:xfrm>
-            <a:off x="669875" y="2188071"/>
-            <a:ext cx="3426232" cy="238720"/>
-          </a:xfrm>
-          <a:prstGeom prst="rect">
-            <a:avLst/>
-          </a:prstGeom>
-          <a:noFill/>
-          <a:ln/>
-        </p:spPr>
-        <p:txBody>
-          <a:bodyPr wrap="square" lIns="0" tIns="0" rIns="0" bIns="0" rtlCol="0" anchor="t"/>
-          <a:lstStyle/>
-          <a:p>
-            <a:pPr algn="l" indent="0" marL="0">
-              <a:lnSpc>
-                <a:spcPts val="1880"/>
-              </a:lnSpc>
-              <a:buNone/>
-            </a:pPr>
-            <a:r>
-              <a:rPr lang="en-US" sz="1450" b="1" dirty="0">
-                <a:solidFill>
-                  <a:srgbClr val="1A7F37"/>
-                </a:solidFill>
-                <a:latin typeface="Courier New" pitchFamily="34" charset="0"/>
-                <a:ea typeface="Courier New" pitchFamily="34" charset="-122"/>
-                <a:cs typeface="Courier New" pitchFamily="34" charset="-120"/>
-              </a:rPr>
-              <a:t>$</a:t>
-            </a:r>
-            <a:pPr algn="l" indent="0" marL="0">
-              <a:lnSpc>
-                <a:spcPts val="1880"/>
-              </a:lnSpc>
-              <a:buNone/>
-            </a:pPr>
-            <a:r>
-              <a:rPr lang="en-US" sz="1450" dirty="0">
-                <a:solidFill>
-                  <a:srgbClr val="1F2328"/>
-                </a:solidFill>
-                <a:latin typeface="Courier New" pitchFamily="34" charset="0"/>
-                <a:ea typeface="Courier New" pitchFamily="34" charset="-122"/>
-                <a:cs typeface="Courier New" pitchFamily="34" charset="-120"/>
-              </a:rPr>
-              <a:t> node -v</a:t>
-            </a:r>
-            <a:endParaRPr lang="en-US" sz="1450" dirty="0"/>
-          </a:p>
-        </p:txBody>
-      </p:sp>
-      <p:sp>
-        <p:nvSpPr>
-          <p:cNvPr id="18" name="Text 14"/>
-          <p:cNvSpPr/>
-          <p:nvPr/>
-        </p:nvSpPr>
-        <p:spPr>
-          <a:xfrm>
-            <a:off x="669875" y="2426791"/>
-            <a:ext cx="3426232" cy="238720"/>
-          </a:xfrm>
-          <a:prstGeom prst="rect">
-            <a:avLst/>
-          </a:prstGeom>
-          <a:noFill/>
-          <a:ln/>
-        </p:spPr>
-        <p:txBody>
-          <a:bodyPr wrap="square" lIns="0" tIns="0" rIns="0" bIns="0" rtlCol="0" anchor="t"/>
-          <a:lstStyle/>
-          <a:p>
-            <a:pPr algn="l" indent="0" marL="0">
-              <a:lnSpc>
-                <a:spcPts val="1880"/>
-              </a:lnSpc>
-              <a:buNone/>
-            </a:pPr>
-            <a:r>
-              <a:rPr lang="en-US" sz="1450" b="1" dirty="0">
-                <a:solidFill>
-                  <a:srgbClr val="1A7F37"/>
-                </a:solidFill>
-                <a:latin typeface="Courier New" pitchFamily="34" charset="0"/>
-                <a:ea typeface="Courier New" pitchFamily="34" charset="-122"/>
-                <a:cs typeface="Courier New" pitchFamily="34" charset="-120"/>
-              </a:rPr>
-              <a:t>$</a:t>
-            </a:r>
-            <a:pPr algn="l" indent="0" marL="0">
-              <a:lnSpc>
-                <a:spcPts val="1880"/>
-              </a:lnSpc>
-              <a:buNone/>
-            </a:pPr>
-            <a:r>
-              <a:rPr lang="en-US" sz="1450" dirty="0">
-                <a:solidFill>
-                  <a:srgbClr val="1F2328"/>
-                </a:solidFill>
-                <a:latin typeface="Courier New" pitchFamily="34" charset="0"/>
-                <a:ea typeface="Courier New" pitchFamily="34" charset="-122"/>
-                <a:cs typeface="Courier New" pitchFamily="34" charset="-120"/>
-              </a:rPr>
-              <a:t> npm -v</a:t>
-            </a:r>
-            <a:endParaRPr lang="en-US" sz="1450" dirty="0"/>
-          </a:p>
-        </p:txBody>
-      </p:sp>
-      <p:sp>
-        <p:nvSpPr>
-          <p:cNvPr id="19" name="Text 15"/>
-          <p:cNvSpPr/>
-          <p:nvPr/>
-        </p:nvSpPr>
-        <p:spPr>
-          <a:xfrm>
-            <a:off x="669875" y="2665512"/>
-            <a:ext cx="3426232" cy="238720"/>
-          </a:xfrm>
-          <a:prstGeom prst="rect">
-            <a:avLst/>
-          </a:prstGeom>
-          <a:noFill/>
-          <a:ln/>
-        </p:spPr>
-        <p:txBody>
-          <a:bodyPr wrap="square" lIns="0" tIns="0" rIns="0" bIns="0" rtlCol="0" anchor="t"/>
-          <a:lstStyle/>
-          <a:p>
-            <a:pPr algn="l" indent="0" marL="0">
-              <a:lnSpc>
-                <a:spcPts val="1880"/>
-              </a:lnSpc>
-              <a:buNone/>
-            </a:pPr>
-            <a:r>
-              <a:rPr lang="en-US" sz="1450" b="1" dirty="0">
-                <a:solidFill>
-                  <a:srgbClr val="1A7F37"/>
-                </a:solidFill>
-                <a:latin typeface="Courier New" pitchFamily="34" charset="0"/>
-                <a:ea typeface="Courier New" pitchFamily="34" charset="-122"/>
-                <a:cs typeface="Courier New" pitchFamily="34" charset="-120"/>
-              </a:rPr>
-              <a:t>$</a:t>
-            </a:r>
-            <a:pPr algn="l" indent="0" marL="0">
-              <a:lnSpc>
-                <a:spcPts val="1880"/>
-              </a:lnSpc>
-              <a:buNone/>
-            </a:pPr>
-            <a:r>
-              <a:rPr lang="en-US" sz="1450" dirty="0">
-                <a:solidFill>
-                  <a:srgbClr val="1F2328"/>
-                </a:solidFill>
-                <a:latin typeface="Courier New" pitchFamily="34" charset="0"/>
-                <a:ea typeface="Courier New" pitchFamily="34" charset="-122"/>
-                <a:cs typeface="Courier New" pitchFamily="34" charset="-120"/>
-              </a:rPr>
-              <a:t> gh --version</a:t>
-            </a:r>
-            <a:endParaRPr lang="en-US" sz="1450" dirty="0"/>
-          </a:p>
-        </p:txBody>
-      </p:sp>
-      <p:sp>
-        <p:nvSpPr>
-          <p:cNvPr id="20" name="Text 16"/>
-          <p:cNvSpPr/>
-          <p:nvPr/>
-        </p:nvSpPr>
-        <p:spPr>
-          <a:xfrm>
-            <a:off x="669875" y="2904232"/>
-            <a:ext cx="3426232" cy="238720"/>
-          </a:xfrm>
-          <a:prstGeom prst="rect">
-            <a:avLst/>
-          </a:prstGeom>
-          <a:noFill/>
-          <a:ln/>
-        </p:spPr>
-        <p:txBody>
-          <a:bodyPr wrap="square" lIns="0" tIns="0" rIns="0" bIns="0" rtlCol="0" anchor="t"/>
-          <a:lstStyle/>
-          <a:p>
-            <a:pPr algn="l" indent="0" marL="0">
-              <a:lnSpc>
-                <a:spcPts val="1880"/>
-              </a:lnSpc>
-              <a:buNone/>
-            </a:pPr>
-            <a:r>
-              <a:rPr lang="en-US" sz="1450" dirty="0">
-                <a:solidFill>
-                  <a:srgbClr val="818B98"/>
-                </a:solidFill>
-                <a:latin typeface="Courier New" pitchFamily="34" charset="0"/>
-                <a:ea typeface="Courier New" pitchFamily="34" charset="-122"/>
-                <a:cs typeface="Courier New" pitchFamily="34" charset="-120"/>
-              </a:rPr>
-              <a:t># gh has its own sign-in</a:t>
-            </a:r>
-            <a:endParaRPr lang="en-US" sz="1450" dirty="0"/>
-          </a:p>
-        </p:txBody>
-      </p:sp>
-      <p:sp>
-        <p:nvSpPr>
-          <p:cNvPr id="21" name="Text 17"/>
-          <p:cNvSpPr/>
-          <p:nvPr/>
-        </p:nvSpPr>
-        <p:spPr>
-          <a:xfrm>
-            <a:off x="669875" y="3142952"/>
-            <a:ext cx="3426232" cy="238720"/>
-          </a:xfrm>
-          <a:prstGeom prst="rect">
-            <a:avLst/>
-          </a:prstGeom>
-          <a:noFill/>
-          <a:ln/>
-        </p:spPr>
-        <p:txBody>
-          <a:bodyPr wrap="square" lIns="0" tIns="0" rIns="0" bIns="0" rtlCol="0" anchor="t"/>
-          <a:lstStyle/>
-          <a:p>
-            <a:pPr algn="l" indent="0" marL="0">
-              <a:lnSpc>
-                <a:spcPts val="1880"/>
-              </a:lnSpc>
-              <a:buNone/>
-            </a:pPr>
-            <a:r>
-              <a:rPr lang="en-US" sz="1450" b="1" dirty="0">
-                <a:solidFill>
-                  <a:srgbClr val="1A7F37"/>
-                </a:solidFill>
-                <a:latin typeface="Courier New" pitchFamily="34" charset="0"/>
-                <a:ea typeface="Courier New" pitchFamily="34" charset="-122"/>
-                <a:cs typeface="Courier New" pitchFamily="34" charset="-120"/>
-              </a:rPr>
-              <a:t>$</a:t>
-            </a:r>
-            <a:pPr algn="l" indent="0" marL="0">
-              <a:lnSpc>
-                <a:spcPts val="1880"/>
-              </a:lnSpc>
-              <a:buNone/>
-            </a:pPr>
-            <a:r>
-              <a:rPr lang="en-US" sz="1450" dirty="0">
-                <a:solidFill>
-                  <a:srgbClr val="1F2328"/>
-                </a:solidFill>
-                <a:latin typeface="Courier New" pitchFamily="34" charset="0"/>
-                <a:ea typeface="Courier New" pitchFamily="34" charset="-122"/>
-                <a:cs typeface="Courier New" pitchFamily="34" charset="-120"/>
-              </a:rPr>
-              <a:t> gh auth status</a:t>
-            </a:r>
-            <a:endParaRPr lang="en-US" sz="1450" dirty="0"/>
-          </a:p>
-        </p:txBody>
-      </p:sp>
-      <p:sp>
-        <p:nvSpPr>
-          <p:cNvPr id="22" name="Text 18"/>
-          <p:cNvSpPr/>
-          <p:nvPr/>
-        </p:nvSpPr>
-        <p:spPr>
-          <a:xfrm>
-            <a:off x="4444752" y="1574750"/>
-            <a:ext cx="4191149" cy="1046262"/>
-          </a:xfrm>
-          <a:prstGeom prst="roundRect">
-            <a:avLst>
-              <a:gd name="adj" fmla="val 12138"/>
-            </a:avLst>
-          </a:prstGeom>
-          <a:solidFill>
-            <a:srgbClr val="FFFFFF"/>
-          </a:solidFill>
-          <a:ln w="9525">
-            <a:solidFill>
-              <a:srgbClr val="8CE7A5"/>
-            </a:solidFill>
-          </a:ln>
-        </p:spPr>
-        <p:txBody>
-          <a:bodyPr wrap="square" rtlCol="0" anchor="ctr"/>
-          <a:lstStyle/>
-          <a:p>
-            <a:pPr indent="0" marL="0">
-              <a:buNone/>
-            </a:pPr>
-            <a:endParaRPr lang="en-US" dirty="0"/>
-          </a:p>
-        </p:txBody>
-      </p:sp>
-      <p:sp>
-        <p:nvSpPr>
-          <p:cNvPr id="23" name="Text 19"/>
-          <p:cNvSpPr/>
-          <p:nvPr/>
-        </p:nvSpPr>
-        <p:spPr>
-          <a:xfrm>
-            <a:off x="4631978" y="1761976"/>
-            <a:ext cx="381000" cy="381000"/>
-          </a:xfrm>
-          <a:prstGeom prst="roundRect">
-            <a:avLst>
-              <a:gd name="adj" fmla="val 23333"/>
-            </a:avLst>
-          </a:prstGeom>
-          <a:solidFill>
-            <a:srgbClr val="DAFBE1"/>
-          </a:solidFill>
-          <a:ln/>
-        </p:spPr>
-        <p:txBody>
-          <a:bodyPr wrap="square" rtlCol="0" anchor="ctr"/>
-          <a:lstStyle/>
-          <a:p>
-            <a:pPr indent="0" marL="0">
-              <a:buNone/>
-            </a:pPr>
-            <a:endParaRPr lang="en-US" dirty="0"/>
-          </a:p>
-        </p:txBody>
-      </p:sp>
-      <p:pic>
-        <p:nvPicPr>
-          <p:cNvPr id="24" name="Image 2" descr="">
-            <a:extLst>
-              <a:ext uri="{C183D7F6-B498-43B3-948B-1728B52AA6E4}">
-                <adec:decorative xmlns:adec="http://schemas.microsoft.com/office/drawing/2017/decorative" val="1"/>
-              </a:ext>
-            </a:extLst>
-          </p:cNvPr>
-          <p:cNvPicPr>
-            <a:picLocks noChangeAspect="1"/>
-          </p:cNvPicPr>
-          <p:nvPr/>
-        </p:nvPicPr>
-        <p:blipFill>
-          <a:blip r:embed="rId4"/>
-          <a:stretch>
-            <a:fillRect/>
-          </a:stretch>
-        </p:blipFill>
-        <p:spPr>
-          <a:xfrm>
-            <a:off x="4714577" y="1844576"/>
-            <a:ext cx="215801" cy="215801"/>
-          </a:xfrm>
-          <a:prstGeom prst="rect">
-            <a:avLst/>
-          </a:prstGeom>
-        </p:spPr>
-      </p:pic>
-      <p:sp>
-        <p:nvSpPr>
-          <p:cNvPr id="25" name="Text 20"/>
-          <p:cNvSpPr/>
-          <p:nvPr/>
-        </p:nvSpPr>
-        <p:spPr>
-          <a:xfrm>
-            <a:off x="5127278" y="1838176"/>
-            <a:ext cx="2233351" cy="228600"/>
-          </a:xfrm>
-          <a:prstGeom prst="rect">
-            <a:avLst/>
-          </a:prstGeom>
-          <a:noFill/>
-          <a:ln/>
-        </p:spPr>
-        <p:txBody>
-          <a:bodyPr wrap="square" lIns="0" tIns="0" rIns="0" bIns="0" rtlCol="0" anchor="t"/>
-          <a:lstStyle/>
-          <a:p>
-            <a:pPr algn="l" indent="0" marL="0">
-              <a:lnSpc>
-                <a:spcPts val="1800"/>
-              </a:lnSpc>
-              <a:buNone/>
-            </a:pPr>
-            <a:r>
-              <a:rPr lang="en-US" sz="1650" b="1" dirty="0">
-                <a:solidFill>
-                  <a:srgbClr val="1F2328"/>
-                </a:solidFill>
-                <a:latin typeface="Arial" pitchFamily="34" charset="0"/>
-                <a:ea typeface="Arial" pitchFamily="34" charset="-122"/>
-                <a:cs typeface="Arial" pitchFamily="34" charset="-120"/>
-              </a:rPr>
-              <a:t>Each shows a version</a:t>
-            </a:r>
-            <a:endParaRPr lang="en-US" sz="1650" dirty="0"/>
-          </a:p>
-        </p:txBody>
-      </p:sp>
-      <p:sp>
-        <p:nvSpPr>
-          <p:cNvPr id="26" name="Text 21"/>
-          <p:cNvSpPr/>
-          <p:nvPr/>
-        </p:nvSpPr>
-        <p:spPr>
-          <a:xfrm>
-            <a:off x="4631978" y="2219176"/>
-            <a:ext cx="3893031" cy="214610"/>
-          </a:xfrm>
-          <a:prstGeom prst="rect">
-            <a:avLst/>
-          </a:prstGeom>
-          <a:noFill/>
-          <a:ln/>
-        </p:spPr>
-        <p:txBody>
-          <a:bodyPr wrap="square" lIns="0" tIns="0" rIns="0" bIns="0" rtlCol="0" anchor="t"/>
-          <a:lstStyle/>
-          <a:p>
-            <a:pPr algn="l" indent="0" marL="0">
-              <a:lnSpc>
-                <a:spcPts val="1690"/>
-              </a:lnSpc>
-              <a:buNone/>
-            </a:pPr>
-            <a:r>
-              <a:rPr lang="en-US" sz="1400" dirty="0">
-                <a:solidFill>
-                  <a:srgbClr val="59636E"/>
-                </a:solidFill>
-                <a:latin typeface="Arial" pitchFamily="34" charset="0"/>
-                <a:ea typeface="Arial" pitchFamily="34" charset="-122"/>
-                <a:cs typeface="Arial" pitchFamily="34" charset="-120"/>
-              </a:rPr>
-              <a:t>Install only what is missing, then check again.</a:t>
-            </a:r>
-            <a:endParaRPr lang="en-US" sz="1400" dirty="0"/>
-          </a:p>
-        </p:txBody>
-      </p:sp>
-      <p:sp>
-        <p:nvSpPr>
-          <p:cNvPr id="27" name="Text 22"/>
-          <p:cNvSpPr/>
-          <p:nvPr/>
-        </p:nvSpPr>
-        <p:spPr>
-          <a:xfrm>
-            <a:off x="4444752" y="2798713"/>
-            <a:ext cx="4191149" cy="1279922"/>
-          </a:xfrm>
-          <a:prstGeom prst="roundRect">
-            <a:avLst>
-              <a:gd name="adj" fmla="val 9922"/>
-            </a:avLst>
-          </a:prstGeom>
-          <a:solidFill>
-            <a:srgbClr val="FFFFFF"/>
-          </a:solidFill>
-          <a:ln w="9525">
-            <a:solidFill>
-              <a:srgbClr val="9CD7FF"/>
-            </a:solidFill>
-          </a:ln>
-        </p:spPr>
-        <p:txBody>
-          <a:bodyPr wrap="square" rtlCol="0" anchor="ctr"/>
-          <a:lstStyle/>
-          <a:p>
-            <a:pPr indent="0" marL="0">
-              <a:buNone/>
-            </a:pPr>
-            <a:endParaRPr lang="en-US" dirty="0"/>
-          </a:p>
-        </p:txBody>
-      </p:sp>
-      <p:sp>
-        <p:nvSpPr>
-          <p:cNvPr id="28" name="Text 23"/>
-          <p:cNvSpPr/>
-          <p:nvPr/>
-        </p:nvSpPr>
-        <p:spPr>
-          <a:xfrm>
-            <a:off x="4631978" y="2985939"/>
-            <a:ext cx="381000" cy="381000"/>
-          </a:xfrm>
-          <a:prstGeom prst="roundRect">
-            <a:avLst>
-              <a:gd name="adj" fmla="val 23333"/>
-            </a:avLst>
-          </a:prstGeom>
-          <a:solidFill>
-            <a:srgbClr val="DDF4FF"/>
-          </a:solidFill>
-          <a:ln/>
-        </p:spPr>
-        <p:txBody>
-          <a:bodyPr wrap="square" rtlCol="0" anchor="ctr"/>
-          <a:lstStyle/>
-          <a:p>
-            <a:pPr indent="0" marL="0">
-              <a:buNone/>
-            </a:pPr>
-            <a:endParaRPr lang="en-US" dirty="0"/>
-          </a:p>
-        </p:txBody>
-      </p:sp>
-      <p:pic>
-        <p:nvPicPr>
-          <p:cNvPr id="29" name="Image 3" descr="">
-            <a:extLst>
-              <a:ext uri="{C183D7F6-B498-43B3-948B-1728B52AA6E4}">
-                <adec:decorative xmlns:adec="http://schemas.microsoft.com/office/drawing/2017/decorative" val="1"/>
-              </a:ext>
-            </a:extLst>
-          </p:cNvPr>
-          <p:cNvPicPr>
-            <a:picLocks noChangeAspect="1"/>
-          </p:cNvPicPr>
-          <p:nvPr/>
-        </p:nvPicPr>
-        <p:blipFill>
-          <a:blip r:embed="rId5"/>
-          <a:stretch>
-            <a:fillRect/>
-          </a:stretch>
-        </p:blipFill>
-        <p:spPr>
-          <a:xfrm>
-            <a:off x="4714577" y="3068538"/>
-            <a:ext cx="215801" cy="215801"/>
-          </a:xfrm>
-          <a:prstGeom prst="rect">
-            <a:avLst/>
-          </a:prstGeom>
-        </p:spPr>
-      </p:pic>
-      <p:sp>
-        <p:nvSpPr>
-          <p:cNvPr id="30" name="Text 24"/>
-          <p:cNvSpPr/>
-          <p:nvPr/>
-        </p:nvSpPr>
-        <p:spPr>
-          <a:xfrm>
-            <a:off x="5127278" y="3062139"/>
-            <a:ext cx="2220903" cy="228600"/>
-          </a:xfrm>
-          <a:prstGeom prst="rect">
-            <a:avLst/>
-          </a:prstGeom>
-          <a:noFill/>
-          <a:ln/>
-        </p:spPr>
-        <p:txBody>
-          <a:bodyPr wrap="square" lIns="0" tIns="0" rIns="0" bIns="0" rtlCol="0" anchor="t"/>
-          <a:lstStyle/>
-          <a:p>
-            <a:pPr algn="l" indent="0" marL="0">
-              <a:lnSpc>
-                <a:spcPts val="1800"/>
-              </a:lnSpc>
-              <a:buNone/>
-            </a:pPr>
-            <a:r>
-              <a:rPr lang="en-US" sz="1650" b="1" dirty="0">
-                <a:solidFill>
-                  <a:srgbClr val="1F2328"/>
-                </a:solidFill>
-                <a:latin typeface="Arial" pitchFamily="34" charset="0"/>
-                <a:ea typeface="Arial" pitchFamily="34" charset="-122"/>
-                <a:cs typeface="Arial" pitchFamily="34" charset="-120"/>
-              </a:rPr>
-              <a:t>Check the gh account</a:t>
-            </a:r>
-            <a:endParaRPr lang="en-US" sz="1650" dirty="0"/>
-          </a:p>
-        </p:txBody>
-      </p:sp>
-      <p:sp>
-        <p:nvSpPr>
-          <p:cNvPr id="31" name="Text 25"/>
-          <p:cNvSpPr/>
-          <p:nvPr/>
-        </p:nvSpPr>
-        <p:spPr>
-          <a:xfrm>
-            <a:off x="4631978" y="3443139"/>
-            <a:ext cx="3893031" cy="448270"/>
-          </a:xfrm>
-          <a:prstGeom prst="rect">
-            <a:avLst/>
-          </a:prstGeom>
-          <a:noFill/>
-          <a:ln/>
-        </p:spPr>
-        <p:txBody>
-          <a:bodyPr wrap="square" lIns="0" tIns="0" rIns="0" bIns="0" rtlCol="0" anchor="t"/>
-          <a:lstStyle/>
-          <a:p>
-            <a:pPr algn="l" indent="0" marL="0">
-              <a:lnSpc>
-                <a:spcPts val="1690"/>
-              </a:lnSpc>
-              <a:buNone/>
-            </a:pPr>
-            <a:r>
-              <a:rPr lang="en-US" sz="1400" dirty="0">
-                <a:solidFill>
-                  <a:srgbClr val="59636E"/>
-                </a:solidFill>
-                <a:latin typeface="Arial" pitchFamily="34" charset="0"/>
-                <a:ea typeface="Arial" pitchFamily="34" charset="-122"/>
-                <a:cs typeface="Arial" pitchFamily="34" charset="-120"/>
-              </a:rPr>
-              <a:t>It must own your fork. If not, run </a:t>
-            </a:r>
-            <a:pPr algn="l" indent="0" marL="0">
-              <a:lnSpc>
-                <a:spcPts val="1690"/>
-              </a:lnSpc>
-              <a:buNone/>
-            </a:pPr>
-            <a:r>
-              <a:rPr lang="en-US" sz="1400" b="1" dirty="0">
-                <a:solidFill>
-                  <a:srgbClr val="0550AE"/>
-                </a:solidFill>
-                <a:latin typeface="Courier New" pitchFamily="34" charset="0"/>
-                <a:ea typeface="Courier New" pitchFamily="34" charset="-122"/>
-                <a:cs typeface="Courier New" pitchFamily="34" charset="-120"/>
-              </a:rPr>
-              <a:t>gh auth login</a:t>
-            </a:r>
-            <a:pPr algn="l" indent="0" marL="0">
-              <a:lnSpc>
-                <a:spcPts val="1690"/>
-              </a:lnSpc>
-              <a:buNone/>
-            </a:pPr>
-            <a:r>
-              <a:rPr lang="en-US" sz="1400" dirty="0">
-                <a:solidFill>
-                  <a:srgbClr val="59636E"/>
-                </a:solidFill>
-                <a:latin typeface="Arial" pitchFamily="34" charset="0"/>
-                <a:ea typeface="Arial" pitchFamily="34" charset="-122"/>
-                <a:cs typeface="Arial" pitchFamily="34" charset="-120"/>
-              </a:rPr>
-              <a:t>.</a:t>
-            </a:r>
-            <a:endParaRPr lang="en-US" sz="1400" dirty="0"/>
-          </a:p>
-        </p:txBody>
-      </p:sp>
-    </p:spTree>
-  </p:cSld>
-  <p:clrMapOvr>
-    <a:masterClrMapping/>
-  </p:clrMapOvr>
-</p:sld>
+<ns0:sld xmlns:ns0="http://schemas.openxmlformats.org/presentationml/2006/main" xmlns:ns1="http://schemas.openxmlformats.org/drawingml/2006/main" xmlns:ns2="http://schemas.microsoft.com/office/drawing/2017/decorative" xmlns:ns3="http://schemas.openxmlformats.org/officeDocument/2006/relationships">
+  <ns0:cSld name="Slide 11">
+    <ns0:bg>
+      <ns0:bgPr>
+        <ns1:solidFill>
+          <ns1:srgbClr val="FFFFFF"/>
+        </ns1:solidFill>
+      </ns0:bgPr>
+    </ns0:bg>
+    <ns0:spTree>
+      <ns0:nvGrpSpPr>
+        <ns0:cNvPr id="1" name=""/>
+        <ns0:cNvGrpSpPr/>
+        <ns0:nvPr/>
+      </ns0:nvGrpSpPr>
+      <ns0:grpSpPr>
+        <ns1:xfrm>
+          <ns1:off x="0" y="0"/>
+          <ns1:ext cx="0" cy="0"/>
+          <ns1:chOff x="0" y="0"/>
+          <ns1:chExt cx="0" cy="0"/>
+        </ns1:xfrm>
+      </ns0:grpSpPr>
+      <ns0:pic>
+        <ns0:nvPicPr>
+          <ns0:cNvPr id="2" name="Image 0" descr="">
+            <ns1:extLst>
+              <ns1:ext uri="{C183D7F6-B498-43B3-948B-1728B52AA6E4}">
+                <ns2:decorative val="1"/>
+              </ns1:ext>
+            </ns1:extLst>
+          </ns0:cNvPr>
+          <ns0:cNvPicPr>
+            <ns1:picLocks noChangeAspect="1"/>
+          </ns0:cNvPicPr>
+          <ns0:nvPr/>
+        </ns0:nvPicPr>
+        <ns0:blipFill>
+          <ns1:blip ns3:embed="rId1"/>
+          <ns1:stretch>
+            <ns1:fillRect/>
+          </ns1:stretch>
+        </ns0:blipFill>
+        <ns0:spPr>
+          <ns1:xfrm>
+            <ns1:off x="6349901" y="0"/>
+            <ns1:ext cx="2793950" cy="1308050"/>
+          </ns1:xfrm>
+          <ns1:prstGeom prst="rect">
+            <ns1:avLst/>
+          </ns1:prstGeom>
+        </ns0:spPr>
+      </ns0:pic>
+      <ns0:sp>
+        <ns0:nvSpPr>
+          <ns0:cNvPr id="3" name="Text 0"/>
+          <ns0:cNvSpPr/>
+          <ns0:nvPr/>
+        </ns0:nvSpPr>
+        <ns0:spPr>
+          <ns1:xfrm>
+            <ns1:off x="7340501" y="177701"/>
+            <ns1:ext cx="1168301" cy="279350"/>
+          </ns1:xfrm>
+          <ns1:prstGeom prst="roundRect">
+            <ns1:avLst>
+              <ns1:gd name="adj" fmla="val 22731"/>
+            </ns1:avLst>
+          </ns1:prstGeom>
+          <ns1:solidFill>
+            <ns1:srgbClr val="1A7F37"/>
+          </ns1:solidFill>
+          <ns1:ln/>
+        </ns0:spPr>
+        <ns0:txBody>
+          <ns1:bodyPr wrap="square" rtlCol="0" anchor="ctr"/>
+          <ns1:lstStyle/>
+          <ns1:p>
+            <ns1:pPr indent="0" marL="0">
+              <ns1:buNone/>
+            </ns1:pPr>
+            <ns1:endParaRPr lang="en-US" dirty="0"/>
+          </ns1:p>
+        </ns0:txBody>
+      </ns0:sp>
+      <ns0:sp>
+        <ns0:nvSpPr>
+          <ns0:cNvPr id="4" name="Text 1"/>
+          <ns0:cNvSpPr/>
+          <ns0:nvPr/>
+        </ns0:nvSpPr>
+        <ns0:spPr>
+          <ns1:xfrm>
+            <ns1:off x="7461041" y="231577"/>
+            <ns1:ext cx="927071" cy="171450"/>
+          </ns1:xfrm>
+          <ns1:prstGeom prst="rect">
+            <ns1:avLst/>
+          </ns1:prstGeom>
+          <ns1:noFill/>
+          <ns1:ln/>
+        </ns0:spPr>
+        <ns0:txBody>
+          <ns1:bodyPr wrap="square" lIns="0" tIns="0" rIns="0" bIns="0" rtlCol="0" anchor="t"/>
+          <ns1:lstStyle/>
+          <ns1:p>
+            <ns1:pPr algn="ctr" indent="0" marL="0">
+              <ns1:buNone/>
+            </ns1:pPr>
+            <ns1:r>
+              <ns1:rPr lang="en-US" sz="1150" b="1" dirty="0">
+                <ns1:solidFill>
+                  <ns1:srgbClr val="FFFFFF"/>
+                </ns1:solidFill>
+                <ns1:latin typeface="Arial" pitchFamily="34" charset="0"/>
+                <ns1:ea typeface="Arial" pitchFamily="34" charset="-122"/>
+                <ns1:cs typeface="Arial" pitchFamily="34" charset="-120"/>
+              </ns1:rPr>
+              <ns1:t>CHAPTER 00</ns1:t>
+            </ns1:r>
+            <ns1:endParaRPr lang="en-US" sz="1150" dirty="0"/>
+          </ns1:p>
+        </ns0:txBody>
+      </ns0:sp>
+      <ns0:pic>
+        <ns0:nvPicPr>
+          <ns0:cNvPr id="5" name="Image 1" descr="Open this chapter on GitHub">
+            <ns1:hlinkClick ns3:id="rId3" tooltip="https://github.com/github/copilot-app-for-beginners/tree/main/00-setup"/>
+          </ns0:cNvPr>
+          <ns0:cNvPicPr>
+            <ns1:picLocks noChangeAspect="1"/>
+          </ns0:cNvPicPr>
+          <ns0:nvPr/>
+        </ns0:nvPicPr>
+        <ns0:blipFill>
+          <ns1:blip ns3:embed="rId2"/>
+          <ns1:stretch>
+            <ns1:fillRect/>
+          </ns1:stretch>
+        </ns0:blipFill>
+        <ns0:spPr>
+          <ns1:xfrm>
+            <ns1:off x="8610600" y="165050"/>
+            <ns1:ext cx="304800" cy="304800"/>
+          </ns1:xfrm>
+          <ns1:prstGeom prst="rect">
+            <ns1:avLst/>
+          </ns1:prstGeom>
+        </ns0:spPr>
+      </ns0:pic>
+      <ns0:sp>
+        <ns0:nvSpPr>
+          <ns0:cNvPr id="6" name="Text 2"/>
+          <ns0:cNvSpPr/>
+          <ns0:nvPr/>
+        </ns0:nvSpPr>
+        <ns0:spPr>
+          <ns1:xfrm>
+            <ns1:off x="507950" y="381000"/>
+            <ns1:ext cx="8161020" cy="190500"/>
+          </ns1:xfrm>
+          <ns1:prstGeom prst="rect">
+            <ns1:avLst/>
+          </ns1:prstGeom>
+          <ns1:noFill/>
+          <ns1:ln/>
+        </ns0:spPr>
+        <ns0:txBody>
+          <ns1:bodyPr wrap="square" lIns="0" tIns="0" rIns="0" bIns="0" rtlCol="0" anchor="t"/>
+          <ns1:lstStyle/>
+          <ns1:p>
+            <ns1:pPr algn="l" indent="0" marL="0">
+              <ns1:buNone/>
+            </ns1:pPr>
+            <ns1:r>
+              <ns1:rPr lang="en-US" sz="1250" b="1" dirty="0">
+                <ns1:solidFill>
+                  <ns1:srgbClr val="1A7F37"/>
+                </ns1:solidFill>
+                <ns1:latin typeface="Arial" pitchFamily="34" charset="0"/>
+                <ns1:ea typeface="Arial" pitchFamily="34" charset="-122"/>
+                <ns1:cs typeface="Arial" pitchFamily="34" charset="-120"/>
+              </ns1:rPr>
+              <ns1:t>SOUNDCHECK</ns1:t>
+            </ns1:r>
+            <ns1:endParaRPr lang="en-US" sz="1250" dirty="0"/>
+          </ns1:p>
+        </ns0:txBody>
+      </ns0:sp>
+      <ns0:sp>
+        <ns0:nvSpPr>
+          <ns0:cNvPr id="7" name="Text 3"/>
+          <ns0:cNvSpPr/>
+          <ns0:nvPr/>
+        </ns0:nvSpPr>
+        <ns0:spPr>
+          <ns1:xfrm>
+            <ns1:off x="507950" y="622250"/>
+            <ns1:ext cx="8161020" cy="419100"/>
+          </ns1:xfrm>
+          <ns1:prstGeom prst="rect">
+            <ns1:avLst/>
+          </ns1:prstGeom>
+          <ns1:noFill/>
+          <ns1:ln/>
+        </ns0:spPr>
+        <ns0:txBody>
+          <ns1:bodyPr wrap="square" lIns="0" tIns="0" rIns="0" bIns="0" rtlCol="0" anchor="t"/>
+          <ns1:lstStyle/>
+          <ns1:p>
+            <ns1:pPr algn="l" indent="0" marL="0">
+              <ns1:lnSpc>
+                <ns1:spcPts val="3300"/>
+              </ns1:lnSpc>
+              <ns1:spcBef>
+                <ns1:spcPts val="400"/>
+              </ns1:spcBef>
+              <ns1:buNone/>
+            </ns1:pPr>
+            <ns1:r>
+              <ns1:rPr lang="en-US" sz="2800" b="1" dirty="0">
+                <ns1:solidFill>
+                  <ns1:srgbClr val="1F2328"/>
+                </ns1:solidFill>
+                <ns1:latin typeface="Arial" pitchFamily="34" charset="0"/>
+                <ns1:ea typeface="Arial" pitchFamily="34" charset="-122"/>
+                <ns1:cs typeface="Arial" pitchFamily="34" charset="-120"/>
+              </ns1:rPr>
+              <ns1:t>Check your tools in Terminal</ns1:t>
+            </ns1:r>
+            <ns1:endParaRPr lang="en-US" sz="2800" dirty="0"/>
+          </ns1:p>
+        </ns0:txBody>
+      </ns0:sp>
+      <ns0:sp>
+        <ns0:nvSpPr>
+          <ns0:cNvPr id="8" name="Text 4"/>
+          <ns0:cNvSpPr/>
+          <ns0:nvPr/>
+        </ns0:nvSpPr>
+        <ns0:spPr>
+          <ns1:xfrm>
+            <ns1:off x="507950" y="1104751"/>
+            <ns1:ext cx="8161020" cy="254050"/>
+          </ns1:xfrm>
+          <ns1:prstGeom prst="rect">
+            <ns1:avLst/>
+          </ns1:prstGeom>
+          <ns1:noFill/>
+          <ns1:ln/>
+        </ns0:spPr>
+        <ns0:txBody>
+          <ns1:bodyPr wrap="square" lIns="0" tIns="0" rIns="0" bIns="0" rtlCol="0" anchor="t"/>
+          <ns1:lstStyle/>
+          <ns1:p>
+            <ns1:pPr algn="l" indent="0" marL="0">
+              <ns1:lnSpc>
+                <ns1:spcPts val="2000"/>
+              </ns1:lnSpc>
+              <ns1:spcBef>
+                <ns1:spcPts val="500"/>
+              </ns1:spcBef>
+              <ns1:buNone/>
+            </ns1:pPr>
+            <ns1:r>
+              <ns1:rPr lang="en-US" sz="1650" dirty="0">
+                <ns1:solidFill>
+                  <ns1:srgbClr val="59636E"/>
+                </ns1:solidFill>
+                <ns1:latin typeface="Arial" pitchFamily="34" charset="0"/>
+                <ns1:ea typeface="Arial" pitchFamily="34" charset="-122"/>
+                <ns1:cs typeface="Arial" pitchFamily="34" charset="-120"/>
+              </ns1:rPr>
+              <ns1:t>Open View &gt; Toggle Panel &gt; Terminal.</ns1:t>
+            </ns1:r>
+            <ns1:pPr algn="l" indent="0" marL="0">
+              <ns1:lnSpc>
+                <ns1:spcPts val="2000"/>
+              </ns1:lnSpc>
+              <ns1:spcBef>
+                <ns1:spcPts val="500"/>
+              </ns1:spcBef>
+              <ns1:buNone/>
+            </ns1:pPr>
+            <ns1:r>
+              <ns1:rPr lang="en-US" sz="1650" b="1" dirty="0">
+                <ns1:solidFill>
+                  <ns1:srgbClr val="59636E"/>
+                </ns1:solidFill>
+                <ns1:latin typeface="Arial" pitchFamily="34" charset="0"/>
+                <ns1:ea typeface="Arial" pitchFamily="34" charset="-122"/>
+                <ns1:cs typeface="Arial" pitchFamily="34" charset="-120"/>
+              </ns1:rPr>
+              <ns1:t/>
+            </ns1:r>
+            <ns1:pPr algn="l" indent="0" marL="0">
+              <ns1:lnSpc>
+                <ns1:spcPts val="2000"/>
+              </ns1:lnSpc>
+              <ns1:spcBef>
+                <ns1:spcPts val="500"/>
+              </ns1:spcBef>
+              <ns1:buNone/>
+            </ns1:pPr>
+            <ns1:r>
+              <ns1:rPr lang="en-US" sz="1650" dirty="0">
+                <ns1:solidFill>
+                  <ns1:srgbClr val="59636E"/>
+                </ns1:solidFill>
+                <ns1:latin typeface="Arial" pitchFamily="34" charset="0"/>
+                <ns1:ea typeface="Arial" pitchFamily="34" charset="-122"/>
+                <ns1:cs typeface="Arial" pitchFamily="34" charset="-120"/>
+              </ns1:rPr>
+              <ns1:t/>
+            </ns1:r>
+            <ns1:pPr algn="l" indent="0" marL="0">
+              <ns1:lnSpc>
+                <ns1:spcPts val="2000"/>
+              </ns1:lnSpc>
+              <ns1:spcBef>
+                <ns1:spcPts val="500"/>
+              </ns1:spcBef>
+              <ns1:buNone/>
+            </ns1:pPr>
+            <ns1:r>
+              <ns1:rPr lang="en-US" sz="1650" b="1" dirty="0">
+                <ns1:solidFill>
+                  <ns1:srgbClr val="59636E"/>
+                </ns1:solidFill>
+                <ns1:latin typeface="Arial" pitchFamily="34" charset="0"/>
+                <ns1:ea typeface="Arial" pitchFamily="34" charset="-122"/>
+                <ns1:cs typeface="Arial" pitchFamily="34" charset="-120"/>
+              </ns1:rPr>
+              <ns1:t/>
+            </ns1:r>
+            <ns1:pPr algn="l" indent="0" marL="0">
+              <ns1:lnSpc>
+                <ns1:spcPts val="2000"/>
+              </ns1:lnSpc>
+              <ns1:spcBef>
+                <ns1:spcPts val="500"/>
+              </ns1:spcBef>
+              <ns1:buNone/>
+            </ns1:pPr>
+            <ns1:r>
+              <ns1:rPr lang="en-US" sz="1650" dirty="0">
+                <ns1:solidFill>
+                  <ns1:srgbClr val="59636E"/>
+                </ns1:solidFill>
+                <ns1:latin typeface="Arial" pitchFamily="34" charset="0"/>
+                <ns1:ea typeface="Arial" pitchFamily="34" charset="-122"/>
+                <ns1:cs typeface="Arial" pitchFamily="34" charset="-120"/>
+              </ns1:rPr>
+              <ns1:t/>
+            </ns1:r>
+            <ns1:pPr algn="l" indent="0" marL="0">
+              <ns1:lnSpc>
+                <ns1:spcPts val="2000"/>
+              </ns1:lnSpc>
+              <ns1:spcBef>
+                <ns1:spcPts val="500"/>
+              </ns1:spcBef>
+              <ns1:buNone/>
+            </ns1:pPr>
+            <ns1:r>
+              <ns1:rPr lang="en-US" sz="1650" b="1" dirty="0">
+                <ns1:solidFill>
+                  <ns1:srgbClr val="59636E"/>
+                </ns1:solidFill>
+                <ns1:latin typeface="Arial" pitchFamily="34" charset="0"/>
+                <ns1:ea typeface="Arial" pitchFamily="34" charset="-122"/>
+                <ns1:cs typeface="Arial" pitchFamily="34" charset="-120"/>
+              </ns1:rPr>
+              <ns1:t/>
+            </ns1:r>
+            <ns1:pPr algn="l" indent="0" marL="0">
+              <ns1:lnSpc>
+                <ns1:spcPts val="2000"/>
+              </ns1:lnSpc>
+              <ns1:spcBef>
+                <ns1:spcPts val="500"/>
+              </ns1:spcBef>
+              <ns1:buNone/>
+            </ns1:pPr>
+            <ns1:r>
+              <ns1:rPr lang="en-US" sz="1650" dirty="0">
+                <ns1:solidFill>
+                  <ns1:srgbClr val="59636E"/>
+                </ns1:solidFill>
+                <ns1:latin typeface="Arial" pitchFamily="34" charset="0"/>
+                <ns1:ea typeface="Arial" pitchFamily="34" charset="-122"/>
+                <ns1:cs typeface="Arial" pitchFamily="34" charset="-120"/>
+              </ns1:rPr>
+              <ns1:t/>
+            </ns1:r>
+            <ns1:endParaRPr lang="en-US" sz="1650" dirty="0"/>
+          </ns1:p>
+        </ns0:txBody>
+      </ns0:sp>
+      <ns0:sp>
+        <ns0:nvSpPr>
+          <ns0:cNvPr id="9" name="Text 5"/>
+          <ns0:cNvSpPr/>
+          <ns0:nvPr/>
+        </ns0:nvSpPr>
+        <ns0:spPr>
+          <ns1:xfrm>
+            <ns1:off x="507950" y="1574750"/>
+            <ns1:ext cx="3682901" cy="2503884"/>
+          </ns1:xfrm>
+          <ns1:prstGeom prst="roundRect">
+            <ns1:avLst>
+              <ns1:gd name="adj" fmla="val 4058"/>
+            </ns1:avLst>
+          </ns1:prstGeom>
+          <ns1:solidFill>
+            <ns1:srgbClr val="F6F8FA"/>
+          </ns1:solidFill>
+          <ns1:ln w="9525">
+            <ns1:solidFill>
+              <ns1:srgbClr val="D1D9E0"/>
+            </ns1:solidFill>
+          </ns1:ln>
+        </ns0:spPr>
+        <ns0:txBody>
+          <ns1:bodyPr wrap="square" rtlCol="0" anchor="ctr"/>
+          <ns1:lstStyle/>
+          <ns1:p>
+            <ns1:pPr indent="0" marL="0">
+              <ns1:buNone/>
+            </ns1:pPr>
+            <ns1:endParaRPr lang="en-US" dirty="0"/>
+          </ns1:p>
+        </ns0:txBody>
+      </ns0:sp>
+      <ns0:sp>
+        <ns0:nvSpPr>
+          <ns0:cNvPr id="10" name="Text 6"/>
+          <ns0:cNvSpPr/>
+          <ns0:nvPr/>
+        </ns0:nvSpPr>
+        <ns0:spPr>
+          <ns1:xfrm>
+            <ns1:off x="517475" y="1584275"/>
+            <ns1:ext cx="3663851" cy="238125"/>
+          </ns1:xfrm>
+          <ns1:prstGeom prst="rect">
+            <ns1:avLst/>
+          </ns1:prstGeom>
+          <ns1:solidFill>
+            <ns1:srgbClr val="EFF2F5"/>
+          </ns1:solidFill>
+          <ns1:ln/>
+        </ns0:spPr>
+        <ns0:txBody>
+          <ns1:bodyPr wrap="square" rtlCol="0" anchor="ctr"/>
+          <ns1:lstStyle/>
+          <ns1:p>
+            <ns1:pPr indent="0" marL="0">
+              <ns1:buNone/>
+            </ns1:pPr>
+            <ns1:endParaRPr lang="en-US" dirty="0"/>
+          </ns1:p>
+        </ns0:txBody>
+      </ns0:sp>
+      <ns0:sp>
+        <ns0:nvSpPr>
+          <ns0:cNvPr id="11" name="Shape 7"/>
+          <ns0:cNvSpPr/>
+          <ns0:nvPr/>
+        </ns0:nvSpPr>
+        <ns0:spPr>
+          <ns1:xfrm>
+            <ns1:off x="517475" y="1817638"/>
+            <ns1:ext cx="3663851" cy="0"/>
+          </ns1:xfrm>
+          <ns1:prstGeom prst="line">
+            <ns1:avLst/>
+          </ns1:prstGeom>
+          <ns1:noFill/>
+          <ns1:ln w="9525">
+            <ns1:solidFill>
+              <ns1:srgbClr val="D1D9E0"/>
+            </ns1:solidFill>
+            <ns1:prstDash val="solid"/>
+          </ns1:ln>
+        </ns0:spPr>
+      </ns0:sp>
+      <ns0:sp>
+        <ns0:nvSpPr>
+          <ns0:cNvPr id="12" name="Text 8"/>
+          <ns0:cNvSpPr/>
+          <ns0:nvPr/>
+        </ns0:nvSpPr>
+        <ns0:spPr>
+          <ns1:xfrm>
+            <ns1:off x="631775" y="1654076"/>
+            <ns1:ext cx="88850" cy="88850"/>
+          </ns1:xfrm>
+          <ns1:prstGeom prst="roundRect">
+            <ns1:avLst>
+              <ns1:gd name="adj" fmla="val 1029150"/>
+            </ns1:avLst>
+          </ns1:prstGeom>
+          <ns1:solidFill>
+            <ns1:srgbClr val="FF5F57"/>
+          </ns1:solidFill>
+          <ns1:ln/>
+        </ns0:spPr>
+        <ns0:txBody>
+          <ns1:bodyPr wrap="square" rtlCol="0" anchor="ctr"/>
+          <ns1:lstStyle/>
+          <ns1:p>
+            <ns1:pPr indent="0" marL="0">
+              <ns1:buNone/>
+            </ns1:pPr>
+            <ns1:endParaRPr lang="en-US" dirty="0"/>
+          </ns1:p>
+        </ns0:txBody>
+      </ns0:sp>
+      <ns0:sp>
+        <ns0:nvSpPr>
+          <ns0:cNvPr id="13" name="Text 9"/>
+          <ns0:cNvSpPr/>
+          <ns0:nvPr/>
+        </ns0:nvSpPr>
+        <ns0:spPr>
+          <ns1:xfrm>
+            <ns1:off x="771376" y="1654076"/>
+            <ns1:ext cx="88850" cy="88850"/>
+          </ns1:xfrm>
+          <ns1:prstGeom prst="roundRect">
+            <ns1:avLst>
+              <ns1:gd name="adj" fmla="val 1029150"/>
+            </ns1:avLst>
+          </ns1:prstGeom>
+          <ns1:solidFill>
+            <ns1:srgbClr val="FEBC2E"/>
+          </ns1:solidFill>
+          <ns1:ln/>
+        </ns0:spPr>
+        <ns0:txBody>
+          <ns1:bodyPr wrap="square" rtlCol="0" anchor="ctr"/>
+          <ns1:lstStyle/>
+          <ns1:p>
+            <ns1:pPr indent="0" marL="0">
+              <ns1:buNone/>
+            </ns1:pPr>
+            <ns1:endParaRPr lang="en-US" dirty="0"/>
+          </ns1:p>
+        </ns0:txBody>
+      </ns0:sp>
+      <ns0:sp>
+        <ns0:nvSpPr>
+          <ns0:cNvPr id="14" name="Text 10"/>
+          <ns0:cNvSpPr/>
+          <ns0:nvPr/>
+        </ns0:nvSpPr>
+        <ns0:spPr>
+          <ns1:xfrm>
+            <ns1:off x="910977" y="1654076"/>
+            <ns1:ext cx="88850" cy="88850"/>
+          </ns1:xfrm>
+          <ns1:prstGeom prst="roundRect">
+            <ns1:avLst>
+              <ns1:gd name="adj" fmla="val 1029150"/>
+            </ns1:avLst>
+          </ns1:prstGeom>
+          <ns1:solidFill>
+            <ns1:srgbClr val="28C840"/>
+          </ns1:solidFill>
+          <ns1:ln/>
+        </ns0:spPr>
+        <ns0:txBody>
+          <ns1:bodyPr wrap="square" rtlCol="0" anchor="ctr"/>
+          <ns1:lstStyle/>
+          <ns1:p>
+            <ns1:pPr indent="0" marL="0">
+              <ns1:buNone/>
+            </ns1:pPr>
+            <ns1:endParaRPr lang="en-US" dirty="0"/>
+          </ns1:p>
+        </ns0:txBody>
+      </ns0:sp>
+      <ns0:sp>
+        <ns0:nvSpPr>
+          <ns0:cNvPr id="15" name="Text 11"/>
+          <ns0:cNvSpPr/>
+          <ns0:nvPr/>
+        </ns0:nvSpPr>
+        <ns0:spPr>
+          <ns1:xfrm>
+            <ns1:off x="1126778" y="1612850"/>
+            <ns1:ext cx="715152" cy="171450"/>
+          </ns1:xfrm>
+          <ns1:prstGeom prst="rect">
+            <ns1:avLst/>
+          </ns1:prstGeom>
+          <ns1:noFill/>
+          <ns1:ln/>
+        </ns0:spPr>
+        <ns0:txBody>
+          <ns1:bodyPr wrap="square" lIns="0" tIns="0" rIns="0" bIns="0" rtlCol="0" anchor="t"/>
+          <ns1:lstStyle/>
+          <ns1:p>
+            <ns1:pPr algn="l" indent="0" marL="0">
+              <ns1:buNone/>
+            </ns1:pPr>
+            <ns1:r>
+              <ns1:rPr lang="en-US" sz="1150" dirty="0">
+                <ns1:solidFill>
+                  <ns1:srgbClr val="59636E"/>
+                </ns1:solidFill>
+                <ns1:latin typeface="Courier New" pitchFamily="34" charset="0"/>
+                <ns1:ea typeface="Courier New" pitchFamily="34" charset="-122"/>
+                <ns1:cs typeface="Courier New" pitchFamily="34" charset="-120"/>
+              </ns1:rPr>
+              <ns1:t>Terminal</ns1:t>
+            </ns1:r>
+            <ns1:endParaRPr lang="en-US" sz="1150" dirty="0"/>
+          </ns1:p>
+        </ns0:txBody>
+      </ns0:sp>
+      <ns0:sp>
+        <ns0:nvSpPr>
+          <ns0:cNvPr id="16" name="Text 12"/>
+          <ns0:cNvSpPr/>
+          <ns0:nvPr/>
+        </ns0:nvSpPr>
+        <ns0:spPr>
+          <ns1:xfrm>
+            <ns1:off x="669875" y="1949351"/>
+            <ns1:ext cx="3426232" cy="238720"/>
+          </ns1:xfrm>
+          <ns1:prstGeom prst="rect">
+            <ns1:avLst/>
+          </ns1:prstGeom>
+          <ns1:noFill/>
+          <ns1:ln/>
+        </ns0:spPr>
+        <ns0:txBody>
+          <ns1:bodyPr wrap="square" lIns="0" tIns="0" rIns="0" bIns="0" rtlCol="0" anchor="t"/>
+          <ns1:lstStyle/>
+          <ns1:p>
+            <ns1:pPr algn="l" indent="0" marL="0">
+              <ns1:lnSpc>
+                <ns1:spcPts val="1880"/>
+              </ns1:lnSpc>
+              <ns1:buNone/>
+            </ns1:pPr>
+            <ns1:r>
+              <ns1:rPr lang="en-US" sz="1450" b="1" dirty="0">
+                <ns1:solidFill>
+                  <ns1:srgbClr val="1A7F37"/>
+                </ns1:solidFill>
+                <ns1:latin typeface="Courier New" pitchFamily="34" charset="0"/>
+                <ns1:ea typeface="Courier New" pitchFamily="34" charset="-122"/>
+                <ns1:cs typeface="Courier New" pitchFamily="34" charset="-120"/>
+              </ns1:rPr>
+              <ns1:t>$</ns1:t>
+            </ns1:r>
+            <ns1:pPr algn="l" indent="0" marL="0">
+              <ns1:lnSpc>
+                <ns1:spcPts val="1880"/>
+              </ns1:lnSpc>
+              <ns1:buNone/>
+            </ns1:pPr>
+            <ns1:r>
+              <ns1:rPr lang="en-US" sz="1450" dirty="0">
+                <ns1:solidFill>
+                  <ns1:srgbClr val="1F2328"/>
+                </ns1:solidFill>
+                <ns1:latin typeface="Courier New" pitchFamily="34" charset="0"/>
+                <ns1:ea typeface="Courier New" pitchFamily="34" charset="-122"/>
+                <ns1:cs typeface="Courier New" pitchFamily="34" charset="-120"/>
+              </ns1:rPr>
+              <ns1:t> git --version</ns1:t>
+            </ns1:r>
+            <ns1:endParaRPr lang="en-US" sz="1450" dirty="0"/>
+          </ns1:p>
+        </ns0:txBody>
+      </ns0:sp>
+      <ns0:sp>
+        <ns0:nvSpPr>
+          <ns0:cNvPr id="17" name="Text 13"/>
+          <ns0:cNvSpPr/>
+          <ns0:nvPr/>
+        </ns0:nvSpPr>
+        <ns0:spPr>
+          <ns1:xfrm>
+            <ns1:off x="669875" y="2188071"/>
+            <ns1:ext cx="3426232" cy="238720"/>
+          </ns1:xfrm>
+          <ns1:prstGeom prst="rect">
+            <ns1:avLst/>
+          </ns1:prstGeom>
+          <ns1:noFill/>
+          <ns1:ln/>
+        </ns0:spPr>
+        <ns0:txBody>
+          <ns1:bodyPr wrap="square" lIns="0" tIns="0" rIns="0" bIns="0" rtlCol="0" anchor="t"/>
+          <ns1:lstStyle/>
+          <ns1:p>
+            <ns1:pPr algn="l" indent="0" marL="0">
+              <ns1:lnSpc>
+                <ns1:spcPts val="1880"/>
+              </ns1:lnSpc>
+              <ns1:buNone/>
+            </ns1:pPr>
+            <ns1:r>
+              <ns1:rPr lang="en-US" sz="1450" b="1" dirty="0">
+                <ns1:solidFill>
+                  <ns1:srgbClr val="1A7F37"/>
+                </ns1:solidFill>
+                <ns1:latin typeface="Courier New" pitchFamily="34" charset="0"/>
+                <ns1:ea typeface="Courier New" pitchFamily="34" charset="-122"/>
+                <ns1:cs typeface="Courier New" pitchFamily="34" charset="-120"/>
+              </ns1:rPr>
+              <ns1:t>$</ns1:t>
+            </ns1:r>
+            <ns1:pPr algn="l" indent="0" marL="0">
+              <ns1:lnSpc>
+                <ns1:spcPts val="1880"/>
+              </ns1:lnSpc>
+              <ns1:buNone/>
+            </ns1:pPr>
+            <ns1:r>
+              <ns1:rPr lang="en-US" sz="1450" dirty="0">
+                <ns1:solidFill>
+                  <ns1:srgbClr val="1F2328"/>
+                </ns1:solidFill>
+                <ns1:latin typeface="Courier New" pitchFamily="34" charset="0"/>
+                <ns1:ea typeface="Courier New" pitchFamily="34" charset="-122"/>
+                <ns1:cs typeface="Courier New" pitchFamily="34" charset="-120"/>
+              </ns1:rPr>
+              <ns1:t> node -v</ns1:t>
+            </ns1:r>
+            <ns1:endParaRPr lang="en-US" sz="1450" dirty="0"/>
+          </ns1:p>
+        </ns0:txBody>
+      </ns0:sp>
+      <ns0:sp>
+        <ns0:nvSpPr>
+          <ns0:cNvPr id="18" name="Text 14"/>
+          <ns0:cNvSpPr/>
+          <ns0:nvPr/>
+        </ns0:nvSpPr>
+        <ns0:spPr>
+          <ns1:xfrm>
+            <ns1:off x="669875" y="2426791"/>
+            <ns1:ext cx="3426232" cy="238720"/>
+          </ns1:xfrm>
+          <ns1:prstGeom prst="rect">
+            <ns1:avLst/>
+          </ns1:prstGeom>
+          <ns1:noFill/>
+          <ns1:ln/>
+        </ns0:spPr>
+        <ns0:txBody>
+          <ns1:bodyPr wrap="square" lIns="0" tIns="0" rIns="0" bIns="0" rtlCol="0" anchor="t"/>
+          <ns1:lstStyle/>
+          <ns1:p>
+            <ns1:pPr algn="l" indent="0" marL="0">
+              <ns1:lnSpc>
+                <ns1:spcPts val="1880"/>
+              </ns1:lnSpc>
+              <ns1:buNone/>
+            </ns1:pPr>
+            <ns1:r>
+              <ns1:rPr lang="en-US" sz="1450" b="1" dirty="0">
+                <ns1:solidFill>
+                  <ns1:srgbClr val="1A7F37"/>
+                </ns1:solidFill>
+                <ns1:latin typeface="Courier New" pitchFamily="34" charset="0"/>
+                <ns1:ea typeface="Courier New" pitchFamily="34" charset="-122"/>
+                <ns1:cs typeface="Courier New" pitchFamily="34" charset="-120"/>
+              </ns1:rPr>
+              <ns1:t>$</ns1:t>
+            </ns1:r>
+            <ns1:pPr algn="l" indent="0" marL="0">
+              <ns1:lnSpc>
+                <ns1:spcPts val="1880"/>
+              </ns1:lnSpc>
+              <ns1:buNone/>
+            </ns1:pPr>
+            <ns1:r>
+              <ns1:rPr lang="en-US" sz="1450" dirty="0">
+                <ns1:solidFill>
+                  <ns1:srgbClr val="1F2328"/>
+                </ns1:solidFill>
+                <ns1:latin typeface="Courier New" pitchFamily="34" charset="0"/>
+                <ns1:ea typeface="Courier New" pitchFamily="34" charset="-122"/>
+                <ns1:cs typeface="Courier New" pitchFamily="34" charset="-120"/>
+              </ns1:rPr>
+              <ns1:t> npm -v</ns1:t>
+            </ns1:r>
+            <ns1:endParaRPr lang="en-US" sz="1450" dirty="0"/>
+          </ns1:p>
+        </ns0:txBody>
+      </ns0:sp>
+      <ns0:sp>
+        <ns0:nvSpPr>
+          <ns0:cNvPr id="19" name="Text 15"/>
+          <ns0:cNvSpPr/>
+          <ns0:nvPr/>
+        </ns0:nvSpPr>
+        <ns0:spPr>
+          <ns1:xfrm>
+            <ns1:off x="669875" y="2665512"/>
+            <ns1:ext cx="3426232" cy="238720"/>
+          </ns1:xfrm>
+          <ns1:prstGeom prst="rect">
+            <ns1:avLst/>
+          </ns1:prstGeom>
+          <ns1:noFill/>
+          <ns1:ln/>
+        </ns0:spPr>
+        <ns0:txBody>
+          <ns1:bodyPr wrap="square" lIns="0" tIns="0" rIns="0" bIns="0" rtlCol="0" anchor="t"/>
+          <ns1:lstStyle/>
+          <ns1:p>
+            <ns1:pPr algn="l" indent="0" marL="0">
+              <ns1:lnSpc>
+                <ns1:spcPts val="1880"/>
+              </ns1:lnSpc>
+              <ns1:buNone/>
+            </ns1:pPr>
+            <ns1:r>
+              <ns1:rPr lang="en-US" sz="1450" b="1" dirty="0">
+                <ns1:solidFill>
+                  <ns1:srgbClr val="1A7F37"/>
+                </ns1:solidFill>
+                <ns1:latin typeface="Courier New" pitchFamily="34" charset="0"/>
+                <ns1:ea typeface="Courier New" pitchFamily="34" charset="-122"/>
+                <ns1:cs typeface="Courier New" pitchFamily="34" charset="-120"/>
+              </ns1:rPr>
+              <ns1:t>$</ns1:t>
+            </ns1:r>
+            <ns1:pPr algn="l" indent="0" marL="0">
+              <ns1:lnSpc>
+                <ns1:spcPts val="1880"/>
+              </ns1:lnSpc>
+              <ns1:buNone/>
+            </ns1:pPr>
+            <ns1:r>
+              <ns1:rPr lang="en-US" sz="1450" dirty="0">
+                <ns1:solidFill>
+                  <ns1:srgbClr val="1F2328"/>
+                </ns1:solidFill>
+                <ns1:latin typeface="Courier New" pitchFamily="34" charset="0"/>
+                <ns1:ea typeface="Courier New" pitchFamily="34" charset="-122"/>
+                <ns1:cs typeface="Courier New" pitchFamily="34" charset="-120"/>
+              </ns1:rPr>
+              <ns1:t> gh --version</ns1:t>
+            </ns1:r>
+            <ns1:endParaRPr lang="en-US" sz="1450" dirty="0"/>
+          </ns1:p>
+        </ns0:txBody>
+      </ns0:sp>
+      <ns0:sp>
+        <ns0:nvSpPr>
+          <ns0:cNvPr id="20" name="Text 16"/>
+          <ns0:cNvSpPr/>
+          <ns0:nvPr/>
+        </ns0:nvSpPr>
+        <ns0:spPr>
+          <ns1:xfrm>
+            <ns1:off x="669875" y="2904232"/>
+            <ns1:ext cx="3426232" cy="238720"/>
+          </ns1:xfrm>
+          <ns1:prstGeom prst="rect">
+            <ns1:avLst/>
+          </ns1:prstGeom>
+          <ns1:noFill/>
+          <ns1:ln/>
+        </ns0:spPr>
+        <ns0:txBody>
+          <ns1:bodyPr wrap="square" lIns="0" tIns="0" rIns="0" bIns="0" rtlCol="0" anchor="t"/>
+          <ns1:lstStyle/>
+          <ns1:p>
+            <ns1:pPr algn="l" indent="0" marL="0">
+              <ns1:lnSpc>
+                <ns1:spcPts val="1880"/>
+              </ns1:lnSpc>
+              <ns1:buNone/>
+            </ns1:pPr>
+            <ns1:r>
+              <ns1:rPr lang="en-US" sz="1450" dirty="0">
+                <ns1:solidFill>
+                  <ns1:srgbClr val="818B98"/>
+                </ns1:solidFill>
+                <ns1:latin typeface="Courier New" pitchFamily="34" charset="0"/>
+                <ns1:ea typeface="Courier New" pitchFamily="34" charset="-122"/>
+                <ns1:cs typeface="Courier New" pitchFamily="34" charset="-120"/>
+              </ns1:rPr>
+              <ns1:t># gh has its own sign-in</ns1:t>
+            </ns1:r>
+            <ns1:endParaRPr lang="en-US" sz="1450" dirty="0"/>
+          </ns1:p>
+        </ns0:txBody>
+      </ns0:sp>
+      <ns0:sp>
+        <ns0:nvSpPr>
+          <ns0:cNvPr id="21" name="Text 17"/>
+          <ns0:cNvSpPr/>
+          <ns0:nvPr/>
+        </ns0:nvSpPr>
+        <ns0:spPr>
+          <ns1:xfrm>
+            <ns1:off x="669875" y="3142952"/>
+            <ns1:ext cx="3426232" cy="238720"/>
+          </ns1:xfrm>
+          <ns1:prstGeom prst="rect">
+            <ns1:avLst/>
+          </ns1:prstGeom>
+          <ns1:noFill/>
+          <ns1:ln/>
+        </ns0:spPr>
+        <ns0:txBody>
+          <ns1:bodyPr wrap="square" lIns="0" tIns="0" rIns="0" bIns="0" rtlCol="0" anchor="t"/>
+          <ns1:lstStyle/>
+          <ns1:p>
+            <ns1:pPr algn="l" indent="0" marL="0">
+              <ns1:lnSpc>
+                <ns1:spcPts val="1880"/>
+              </ns1:lnSpc>
+              <ns1:buNone/>
+            </ns1:pPr>
+            <ns1:r>
+              <ns1:rPr lang="en-US" sz="1450" b="1" dirty="0">
+                <ns1:solidFill>
+                  <ns1:srgbClr val="1A7F37"/>
+                </ns1:solidFill>
+                <ns1:latin typeface="Courier New" pitchFamily="34" charset="0"/>
+                <ns1:ea typeface="Courier New" pitchFamily="34" charset="-122"/>
+                <ns1:cs typeface="Courier New" pitchFamily="34" charset="-120"/>
+              </ns1:rPr>
+              <ns1:t>$</ns1:t>
+            </ns1:r>
+            <ns1:pPr algn="l" indent="0" marL="0">
+              <ns1:lnSpc>
+                <ns1:spcPts val="1880"/>
+              </ns1:lnSpc>
+              <ns1:buNone/>
+            </ns1:pPr>
+            <ns1:r>
+              <ns1:rPr lang="en-US" sz="1450" dirty="0">
+                <ns1:solidFill>
+                  <ns1:srgbClr val="1F2328"/>
+                </ns1:solidFill>
+                <ns1:latin typeface="Courier New" pitchFamily="34" charset="0"/>
+                <ns1:ea typeface="Courier New" pitchFamily="34" charset="-122"/>
+                <ns1:cs typeface="Courier New" pitchFamily="34" charset="-120"/>
+              </ns1:rPr>
+              <ns1:t> gh auth status</ns1:t>
+            </ns1:r>
+            <ns1:endParaRPr lang="en-US" sz="1450" dirty="0"/>
+          </ns1:p>
+        </ns0:txBody>
+      </ns0:sp>
+      <ns0:sp>
+        <ns0:nvSpPr>
+          <ns0:cNvPr id="22" name="Text 18"/>
+          <ns0:cNvSpPr/>
+          <ns0:nvPr/>
+        </ns0:nvSpPr>
+        <ns0:spPr>
+          <ns1:xfrm>
+            <ns1:off x="4444752" y="1574750"/>
+            <ns1:ext cx="4191149" cy="1046262"/>
+          </ns1:xfrm>
+          <ns1:prstGeom prst="roundRect">
+            <ns1:avLst>
+              <ns1:gd name="adj" fmla="val 12138"/>
+            </ns1:avLst>
+          </ns1:prstGeom>
+          <ns1:solidFill>
+            <ns1:srgbClr val="FFFFFF"/>
+          </ns1:solidFill>
+          <ns1:ln w="9525">
+            <ns1:solidFill>
+              <ns1:srgbClr val="8CE7A5"/>
+            </ns1:solidFill>
+          </ns1:ln>
+        </ns0:spPr>
+        <ns0:txBody>
+          <ns1:bodyPr wrap="square" rtlCol="0" anchor="ctr"/>
+          <ns1:lstStyle/>
+          <ns1:p>
+            <ns1:pPr indent="0" marL="0">
+              <ns1:buNone/>
+            </ns1:pPr>
+            <ns1:endParaRPr lang="en-US" dirty="0"/>
+          </ns1:p>
+        </ns0:txBody>
+      </ns0:sp>
+      <ns0:sp>
+        <ns0:nvSpPr>
+          <ns0:cNvPr id="23" name="Text 19"/>
+          <ns0:cNvSpPr/>
+          <ns0:nvPr/>
+        </ns0:nvSpPr>
+        <ns0:spPr>
+          <ns1:xfrm>
+            <ns1:off x="4631978" y="1761976"/>
+            <ns1:ext cx="381000" cy="381000"/>
+          </ns1:xfrm>
+          <ns1:prstGeom prst="roundRect">
+            <ns1:avLst>
+              <ns1:gd name="adj" fmla="val 23333"/>
+            </ns1:avLst>
+          </ns1:prstGeom>
+          <ns1:solidFill>
+            <ns1:srgbClr val="DAFBE1"/>
+          </ns1:solidFill>
+          <ns1:ln/>
+        </ns0:spPr>
+        <ns0:txBody>
+          <ns1:bodyPr wrap="square" rtlCol="0" anchor="ctr"/>
+          <ns1:lstStyle/>
+          <ns1:p>
+            <ns1:pPr indent="0" marL="0">
+              <ns1:buNone/>
+            </ns1:pPr>
+            <ns1:endParaRPr lang="en-US" dirty="0"/>
+          </ns1:p>
+        </ns0:txBody>
+      </ns0:sp>
+      <ns0:pic>
+        <ns0:nvPicPr>
+          <ns0:cNvPr id="24" name="Image 2" descr="">
+            <ns1:extLst>
+              <ns1:ext uri="{C183D7F6-B498-43B3-948B-1728B52AA6E4}">
+                <ns2:decorative val="1"/>
+              </ns1:ext>
+            </ns1:extLst>
+          </ns0:cNvPr>
+          <ns0:cNvPicPr>
+            <ns1:picLocks noChangeAspect="1"/>
+          </ns0:cNvPicPr>
+          <ns0:nvPr/>
+        </ns0:nvPicPr>
+        <ns0:blipFill>
+          <ns1:blip ns3:embed="rId4"/>
+          <ns1:stretch>
+            <ns1:fillRect/>
+          </ns1:stretch>
+        </ns0:blipFill>
+        <ns0:spPr>
+          <ns1:xfrm>
+            <ns1:off x="4714577" y="1844576"/>
+            <ns1:ext cx="215801" cy="215801"/>
+          </ns1:xfrm>
+          <ns1:prstGeom prst="rect">
+            <ns1:avLst/>
+          </ns1:prstGeom>
+        </ns0:spPr>
+      </ns0:pic>
+      <ns0:sp>
+        <ns0:nvSpPr>
+          <ns0:cNvPr id="25" name="Text 20"/>
+          <ns0:cNvSpPr/>
+          <ns0:nvPr/>
+        </ns0:nvSpPr>
+        <ns0:spPr>
+          <ns1:xfrm>
+            <ns1:off x="5127278" y="1838176"/>
+            <ns1:ext cx="2233351" cy="228600"/>
+          </ns1:xfrm>
+          <ns1:prstGeom prst="rect">
+            <ns1:avLst/>
+          </ns1:prstGeom>
+          <ns1:noFill/>
+          <ns1:ln/>
+        </ns0:spPr>
+        <ns0:txBody>
+          <ns1:bodyPr wrap="square" lIns="0" tIns="0" rIns="0" bIns="0" rtlCol="0" anchor="t"/>
+          <ns1:lstStyle/>
+          <ns1:p>
+            <ns1:pPr algn="l" indent="0" marL="0">
+              <ns1:lnSpc>
+                <ns1:spcPts val="1800"/>
+              </ns1:lnSpc>
+              <ns1:buNone/>
+            </ns1:pPr>
+            <ns1:r>
+              <ns1:rPr lang="en-US" sz="1650" b="1" dirty="0">
+                <ns1:solidFill>
+                  <ns1:srgbClr val="1F2328"/>
+                </ns1:solidFill>
+                <ns1:latin typeface="Arial" pitchFamily="34" charset="0"/>
+                <ns1:ea typeface="Arial" pitchFamily="34" charset="-122"/>
+                <ns1:cs typeface="Arial" pitchFamily="34" charset="-120"/>
+              </ns1:rPr>
+              <ns1:t>Each shows a version</ns1:t>
+            </ns1:r>
+            <ns1:endParaRPr lang="en-US" sz="1650" dirty="0"/>
+          </ns1:p>
+        </ns0:txBody>
+      </ns0:sp>
+      <ns0:sp>
+        <ns0:nvSpPr>
+          <ns0:cNvPr id="26" name="Text 21"/>
+          <ns0:cNvSpPr/>
+          <ns0:nvPr/>
+        </ns0:nvSpPr>
+        <ns0:spPr>
+          <ns1:xfrm>
+            <ns1:off x="4631978" y="2219176"/>
+            <ns1:ext cx="3893031" cy="214610"/>
+          </ns1:xfrm>
+          <ns1:prstGeom prst="rect">
+            <ns1:avLst/>
+          </ns1:prstGeom>
+          <ns1:noFill/>
+          <ns1:ln/>
+        </ns0:spPr>
+        <ns0:txBody>
+          <ns1:bodyPr wrap="square" lIns="0" tIns="0" rIns="0" bIns="0" rtlCol="0" anchor="t"/>
+          <ns1:lstStyle/>
+          <ns1:p>
+            <ns1:pPr algn="l" indent="0" marL="0">
+              <ns1:lnSpc>
+                <ns1:spcPts val="1690"/>
+              </ns1:lnSpc>
+              <ns1:buNone/>
+            </ns1:pPr>
+            <ns1:r>
+              <ns1:rPr lang="en-US" sz="1400" dirty="0">
+                <ns1:solidFill>
+                  <ns1:srgbClr val="59636E"/>
+                </ns1:solidFill>
+                <ns1:latin typeface="Arial" pitchFamily="34" charset="0"/>
+                <ns1:ea typeface="Arial" pitchFamily="34" charset="-122"/>
+                <ns1:cs typeface="Arial" pitchFamily="34" charset="-120"/>
+              </ns1:rPr>
+              <ns1:t>Install only what is missing, then check again.</ns1:t>
+            </ns1:r>
+            <ns1:endParaRPr lang="en-US" sz="1400" dirty="0"/>
+          </ns1:p>
+        </ns0:txBody>
+      </ns0:sp>
+      <ns0:sp>
+        <ns0:nvSpPr>
+          <ns0:cNvPr id="27" name="Text 22"/>
+          <ns0:cNvSpPr/>
+          <ns0:nvPr/>
+        </ns0:nvSpPr>
+        <ns0:spPr>
+          <ns1:xfrm>
+            <ns1:off x="4444752" y="2798713"/>
+            <ns1:ext cx="4191149" cy="1279922"/>
+          </ns1:xfrm>
+          <ns1:prstGeom prst="roundRect">
+            <ns1:avLst>
+              <ns1:gd name="adj" fmla="val 9922"/>
+            </ns1:avLst>
+          </ns1:prstGeom>
+          <ns1:solidFill>
+            <ns1:srgbClr val="FFFFFF"/>
+          </ns1:solidFill>
+          <ns1:ln w="9525">
+            <ns1:solidFill>
+              <ns1:srgbClr val="9CD7FF"/>
+            </ns1:solidFill>
+          </ns1:ln>
+        </ns0:spPr>
+        <ns0:txBody>
+          <ns1:bodyPr wrap="square" rtlCol="0" anchor="ctr"/>
+          <ns1:lstStyle/>
+          <ns1:p>
+            <ns1:pPr indent="0" marL="0">
+              <ns1:buNone/>
+            </ns1:pPr>
+            <ns1:endParaRPr lang="en-US" dirty="0"/>
+          </ns1:p>
+        </ns0:txBody>
+      </ns0:sp>
+      <ns0:sp>
+        <ns0:nvSpPr>
+          <ns0:cNvPr id="28" name="Text 23"/>
+          <ns0:cNvSpPr/>
+          <ns0:nvPr/>
+        </ns0:nvSpPr>
+        <ns0:spPr>
+          <ns1:xfrm>
+            <ns1:off x="4631978" y="2985939"/>
+            <ns1:ext cx="381000" cy="381000"/>
+          </ns1:xfrm>
+          <ns1:prstGeom prst="roundRect">
+            <ns1:avLst>
+              <ns1:gd name="adj" fmla="val 23333"/>
+            </ns1:avLst>
+          </ns1:prstGeom>
+          <ns1:solidFill>
+            <ns1:srgbClr val="DDF4FF"/>
+          </ns1:solidFill>
+          <ns1:ln/>
+        </ns0:spPr>
+        <ns0:txBody>
+          <ns1:bodyPr wrap="square" rtlCol="0" anchor="ctr"/>
+          <ns1:lstStyle/>
+          <ns1:p>
+            <ns1:pPr indent="0" marL="0">
+              <ns1:buNone/>
+            </ns1:pPr>
+            <ns1:endParaRPr lang="en-US" dirty="0"/>
+          </ns1:p>
+        </ns0:txBody>
+      </ns0:sp>
+      <ns0:pic>
+        <ns0:nvPicPr>
+          <ns0:cNvPr id="29" name="Image 3" descr="">
+            <ns1:extLst>
+              <ns1:ext uri="{C183D7F6-B498-43B3-948B-1728B52AA6E4}">
+                <ns2:decorative val="1"/>
+              </ns1:ext>
+            </ns1:extLst>
+          </ns0:cNvPr>
+          <ns0:cNvPicPr>
+            <ns1:picLocks noChangeAspect="1"/>
+          </ns0:cNvPicPr>
+          <ns0:nvPr/>
+        </ns0:nvPicPr>
+        <ns0:blipFill>
+          <ns1:blip ns3:embed="rId5"/>
+          <ns1:stretch>
+            <ns1:fillRect/>
+          </ns1:stretch>
+        </ns0:blipFill>
+        <ns0:spPr>
+          <ns1:xfrm>
+            <ns1:off x="4714577" y="3068538"/>
+            <ns1:ext cx="215801" cy="215801"/>
+          </ns1:xfrm>
+          <ns1:prstGeom prst="rect">
+            <ns1:avLst/>
+          </ns1:prstGeom>
+        </ns0:spPr>
+      </ns0:pic>
+      <ns0:sp>
+        <ns0:nvSpPr>
+          <ns0:cNvPr id="30" name="Text 24"/>
+          <ns0:cNvSpPr/>
+          <ns0:nvPr/>
+        </ns0:nvSpPr>
+        <ns0:spPr>
+          <ns1:xfrm>
+            <ns1:off x="5127278" y="3062139"/>
+            <ns1:ext cx="2220903" cy="228600"/>
+          </ns1:xfrm>
+          <ns1:prstGeom prst="rect">
+            <ns1:avLst/>
+          </ns1:prstGeom>
+          <ns1:noFill/>
+          <ns1:ln/>
+        </ns0:spPr>
+        <ns0:txBody>
+          <ns1:bodyPr wrap="square" lIns="0" tIns="0" rIns="0" bIns="0" rtlCol="0" anchor="t"/>
+          <ns1:lstStyle/>
+          <ns1:p>
+            <ns1:pPr algn="l" indent="0" marL="0">
+              <ns1:lnSpc>
+                <ns1:spcPts val="1800"/>
+              </ns1:lnSpc>
+              <ns1:buNone/>
+            </ns1:pPr>
+            <ns1:r>
+              <ns1:rPr lang="en-US" sz="1650" b="1" dirty="0">
+                <ns1:solidFill>
+                  <ns1:srgbClr val="1F2328"/>
+                </ns1:solidFill>
+                <ns1:latin typeface="Arial" pitchFamily="34" charset="0"/>
+                <ns1:ea typeface="Arial" pitchFamily="34" charset="-122"/>
+                <ns1:cs typeface="Arial" pitchFamily="34" charset="-120"/>
+              </ns1:rPr>
+              <ns1:t>Check the gh account</ns1:t>
+            </ns1:r>
+            <ns1:endParaRPr lang="en-US" sz="1650" dirty="0"/>
+          </ns1:p>
+        </ns0:txBody>
+      </ns0:sp>
+      <ns0:sp>
+        <ns0:nvSpPr>
+          <ns0:cNvPr id="31" name="Text 25"/>
+          <ns0:cNvSpPr/>
+          <ns0:nvPr/>
+        </ns0:nvSpPr>
+        <ns0:spPr>
+          <ns1:xfrm>
+            <ns1:off x="4631978" y="3443139"/>
+            <ns1:ext cx="3893031" cy="448270"/>
+          </ns1:xfrm>
+          <ns1:prstGeom prst="rect">
+            <ns1:avLst/>
+          </ns1:prstGeom>
+          <ns1:noFill/>
+          <ns1:ln/>
+        </ns0:spPr>
+        <ns0:txBody>
+          <ns1:bodyPr wrap="square" lIns="0" tIns="0" rIns="0" bIns="0" rtlCol="0" anchor="t"/>
+          <ns1:lstStyle/>
+          <ns1:p>
+            <ns1:pPr algn="l" indent="0" marL="0">
+              <ns1:lnSpc>
+                <ns1:spcPts val="1690"/>
+              </ns1:lnSpc>
+              <ns1:buNone/>
+            </ns1:pPr>
+            <ns1:r>
+              <ns1:rPr lang="en-US" sz="1400" dirty="0">
+                <ns1:solidFill>
+                  <ns1:srgbClr val="59636E"/>
+                </ns1:solidFill>
+                <ns1:latin typeface="Arial" pitchFamily="34" charset="0"/>
+                <ns1:ea typeface="Arial" pitchFamily="34" charset="-122"/>
+                <ns1:cs typeface="Arial" pitchFamily="34" charset="-120"/>
+              </ns1:rPr>
+              <ns1:t>It must own your fork. If not, run </ns1:t>
+            </ns1:r>
+            <ns1:pPr algn="l" indent="0" marL="0">
+              <ns1:lnSpc>
+                <ns1:spcPts val="1690"/>
+              </ns1:lnSpc>
+              <ns1:buNone/>
+            </ns1:pPr>
+            <ns1:r>
+              <ns1:rPr lang="en-US" sz="1400" b="1" dirty="0">
+                <ns1:solidFill>
+                  <ns1:srgbClr val="0550AE"/>
+                </ns1:solidFill>
+                <ns1:latin typeface="Courier New" pitchFamily="34" charset="0"/>
+                <ns1:ea typeface="Courier New" pitchFamily="34" charset="-122"/>
+                <ns1:cs typeface="Courier New" pitchFamily="34" charset="-120"/>
+              </ns1:rPr>
+              <ns1:t>gh auth login</ns1:t>
+            </ns1:r>
+            <ns1:pPr algn="l" indent="0" marL="0">
+              <ns1:lnSpc>
+                <ns1:spcPts val="1690"/>
+              </ns1:lnSpc>
+              <ns1:buNone/>
+            </ns1:pPr>
+            <ns1:r>
+              <ns1:rPr lang="en-US" sz="1400" dirty="0">
+                <ns1:solidFill>
+                  <ns1:srgbClr val="59636E"/>
+                </ns1:solidFill>
+                <ns1:latin typeface="Arial" pitchFamily="34" charset="0"/>
+                <ns1:ea typeface="Arial" pitchFamily="34" charset="-122"/>
+                <ns1:cs typeface="Arial" pitchFamily="34" charset="-120"/>
+              </ns1:rPr>
+              <ns1:t>.</ns1:t>
+            </ns1:r>
+            <ns1:endParaRPr lang="en-US" sz="1400" dirty="0"/>
+          </ns1:p>
+        </ns0:txBody>
+      </ns0:sp>
+    </ns0:spTree>
+  </ns0:cSld>
+  <ns0:clrMapOvr>
+    <ns1:masterClrMapping/>
+  </ns0:clrMapOvr>
+</ns0:sld>
 </file>
 
 <file path=ppt/slides/slide12.xml><?xml version="1.0" encoding="utf-8"?>
@@ -8777,7 +8777,7 @@
       </p:sp>
       <p:pic>
         <p:nvPicPr>
-          <p:cNvPr id="10" name="Image 2" descr="Setting up the studio analogy for GitHub Copilot app setup">    </p:cNvPr>
+          <p:cNvPr id="10" name="Image 2" descr="Setting up the studio analogy for GitHub Copilot app setup"/>
           <p:cNvPicPr>
             <a:picLocks noChangeAspect="1"/>
           </p:cNvPicPr>
@@ -11708,7 +11708,7 @@
       </p:sp>
       <p:pic>
         <p:nvPicPr>
-          <p:cNvPr id="21" name="Image 2" descr="Sign in to the Copilot app">    </p:cNvPr>
+          <p:cNvPr id="21" name="Image 2" descr="Sign in to the Copilot app"/>
           <p:cNvPicPr>
             <a:picLocks noChangeAspect="1"/>
           </p:cNvPicPr>
@@ -12158,925 +12158,925 @@
 </file>
 
 <file path=ppt/slides/slide8.xml><?xml version="1.0" encoding="utf-8"?>
-<p:sld xmlns:a="http://schemas.openxmlformats.org/drawingml/2006/main" xmlns:r="http://schemas.openxmlformats.org/officeDocument/2006/relationships" xmlns:p="http://schemas.openxmlformats.org/presentationml/2006/main">
-  <p:cSld name="Slide 8">
-    <p:bg>
-      <p:bgPr>
-        <a:solidFill>
-          <a:srgbClr val="FFFFFF"/>
-        </a:solidFill>
-      </p:bgPr>
-    </p:bg>
-    <p:spTree>
-      <p:nvGrpSpPr>
-        <p:cNvPr id="1" name=""/>
-        <p:cNvGrpSpPr/>
-        <p:nvPr/>
-      </p:nvGrpSpPr>
-      <p:grpSpPr>
-        <a:xfrm>
-          <a:off x="0" y="0"/>
-          <a:ext cx="0" cy="0"/>
-          <a:chOff x="0" y="0"/>
-          <a:chExt cx="0" cy="0"/>
-        </a:xfrm>
-      </p:grpSpPr>
-      <p:pic>
-        <p:nvPicPr>
-          <p:cNvPr id="2" name="Image 0" descr="">
-            <a:extLst>
-              <a:ext uri="{C183D7F6-B498-43B3-948B-1728B52AA6E4}">
-                <adec:decorative xmlns:adec="http://schemas.microsoft.com/office/drawing/2017/decorative" val="1"/>
-              </a:ext>
-            </a:extLst>
-          </p:cNvPr>
-          <p:cNvPicPr>
-            <a:picLocks noChangeAspect="1"/>
-          </p:cNvPicPr>
-          <p:nvPr/>
-        </p:nvPicPr>
-        <p:blipFill>
-          <a:blip r:embed="rId1"/>
-          <a:stretch>
-            <a:fillRect/>
-          </a:stretch>
-        </p:blipFill>
-        <p:spPr>
-          <a:xfrm>
-            <a:off x="6349901" y="0"/>
-            <a:ext cx="2793950" cy="1308050"/>
-          </a:xfrm>
-          <a:prstGeom prst="rect">
-            <a:avLst/>
-          </a:prstGeom>
-        </p:spPr>
-      </p:pic>
-      <p:sp>
-        <p:nvSpPr>
-          <p:cNvPr id="3" name="Text 0"/>
-          <p:cNvSpPr/>
-          <p:nvPr/>
-        </p:nvSpPr>
-        <p:spPr>
-          <a:xfrm>
-            <a:off x="7340501" y="177701"/>
-            <a:ext cx="1168301" cy="279350"/>
-          </a:xfrm>
-          <a:prstGeom prst="roundRect">
-            <a:avLst>
-              <a:gd name="adj" fmla="val 22731"/>
-            </a:avLst>
-          </a:prstGeom>
-          <a:solidFill>
-            <a:srgbClr val="1A7F37"/>
-          </a:solidFill>
-          <a:ln/>
-        </p:spPr>
-        <p:txBody>
-          <a:bodyPr wrap="square" rtlCol="0" anchor="ctr"/>
-          <a:lstStyle/>
-          <a:p>
-            <a:pPr indent="0" marL="0">
-              <a:buNone/>
-            </a:pPr>
-            <a:endParaRPr lang="en-US" dirty="0"/>
-          </a:p>
-        </p:txBody>
-      </p:sp>
-      <p:sp>
-        <p:nvSpPr>
-          <p:cNvPr id="4" name="Text 1"/>
-          <p:cNvSpPr/>
-          <p:nvPr/>
-        </p:nvSpPr>
-        <p:spPr>
-          <a:xfrm>
-            <a:off x="7461041" y="231577"/>
-            <a:ext cx="927071" cy="171450"/>
-          </a:xfrm>
-          <a:prstGeom prst="rect">
-            <a:avLst/>
-          </a:prstGeom>
-          <a:noFill/>
-          <a:ln/>
-        </p:spPr>
-        <p:txBody>
-          <a:bodyPr wrap="square" lIns="0" tIns="0" rIns="0" bIns="0" rtlCol="0" anchor="t"/>
-          <a:lstStyle/>
-          <a:p>
-            <a:pPr algn="ctr" indent="0" marL="0">
-              <a:buNone/>
-            </a:pPr>
-            <a:r>
-              <a:rPr lang="en-US" sz="1150" b="1" dirty="0">
-                <a:solidFill>
-                  <a:srgbClr val="FFFFFF"/>
-                </a:solidFill>
-                <a:latin typeface="Arial" pitchFamily="34" charset="0"/>
-                <a:ea typeface="Arial" pitchFamily="34" charset="-122"/>
-                <a:cs typeface="Arial" pitchFamily="34" charset="-120"/>
-              </a:rPr>
-              <a:t>CHAPTER 00</a:t>
-            </a:r>
-            <a:endParaRPr lang="en-US" sz="1150" dirty="0"/>
-          </a:p>
-        </p:txBody>
-      </p:sp>
-      <p:pic>
-        <p:nvPicPr>
-          <p:cNvPr id="5" name="Image 1" descr="Open this chapter on GitHub">
-            <a:hlinkClick r:id="rId3" tooltip="https://github.com/github/copilot-app-for-beginners/tree/main/00-setup"/>
-          </p:cNvPr>
-          <p:cNvPicPr>
-            <a:picLocks noChangeAspect="1"/>
-          </p:cNvPicPr>
-          <p:nvPr/>
-        </p:nvPicPr>
-        <p:blipFill>
-          <a:blip r:embed="rId2"/>
-          <a:stretch>
-            <a:fillRect/>
-          </a:stretch>
-        </p:blipFill>
-        <p:spPr>
-          <a:xfrm>
-            <a:off x="8610600" y="165050"/>
-            <a:ext cx="304800" cy="304800"/>
-          </a:xfrm>
-          <a:prstGeom prst="rect">
-            <a:avLst/>
-          </a:prstGeom>
-        </p:spPr>
-      </p:pic>
-      <p:sp>
-        <p:nvSpPr>
-          <p:cNvPr id="6" name="Text 2"/>
-          <p:cNvSpPr/>
-          <p:nvPr/>
-        </p:nvSpPr>
-        <p:spPr>
-          <a:xfrm>
-            <a:off x="507950" y="381000"/>
-            <a:ext cx="8161020" cy="190500"/>
-          </a:xfrm>
-          <a:prstGeom prst="rect">
-            <a:avLst/>
-          </a:prstGeom>
-          <a:noFill/>
-          <a:ln/>
-        </p:spPr>
-        <p:txBody>
-          <a:bodyPr wrap="square" lIns="0" tIns="0" rIns="0" bIns="0" rtlCol="0" anchor="t"/>
-          <a:lstStyle/>
-          <a:p>
-            <a:pPr algn="l" indent="0" marL="0">
-              <a:buNone/>
-            </a:pPr>
-            <a:r>
-              <a:rPr lang="en-US" sz="1250" b="1" dirty="0">
-                <a:solidFill>
-                  <a:srgbClr val="8250DF"/>
-                </a:solidFill>
-                <a:latin typeface="Arial" pitchFamily="34" charset="0"/>
-                <a:ea typeface="Arial" pitchFamily="34" charset="-122"/>
-                <a:cs typeface="Arial" pitchFamily="34" charset="-120"/>
-              </a:rPr>
-              <a:t>CONNECT YOUR REPOSITORY</a:t>
-            </a:r>
-            <a:endParaRPr lang="en-US" sz="1250" dirty="0"/>
-          </a:p>
-        </p:txBody>
-      </p:sp>
-      <p:sp>
-        <p:nvSpPr>
-          <p:cNvPr id="7" name="Text 3"/>
-          <p:cNvSpPr/>
-          <p:nvPr/>
-        </p:nvSpPr>
-        <p:spPr>
-          <a:xfrm>
-            <a:off x="507950" y="622250"/>
-            <a:ext cx="8161020" cy="419100"/>
-          </a:xfrm>
-          <a:prstGeom prst="rect">
-            <a:avLst/>
-          </a:prstGeom>
-          <a:noFill/>
-          <a:ln/>
-        </p:spPr>
-        <p:txBody>
-          <a:bodyPr wrap="square" lIns="0" tIns="0" rIns="0" bIns="0" rtlCol="0" anchor="t"/>
-          <a:lstStyle/>
-          <a:p>
-            <a:pPr algn="l" indent="0" marL="0">
-              <a:lnSpc>
-                <a:spcPts val="3300"/>
-              </a:lnSpc>
-              <a:spcBef>
-                <a:spcPts val="400"/>
-              </a:spcBef>
-              <a:buNone/>
-            </a:pPr>
-            <a:r>
-              <a:rPr lang="en-US" sz="2800" b="1" dirty="0">
-                <a:solidFill>
-                  <a:srgbClr val="1F2328"/>
-                </a:solidFill>
-                <a:latin typeface="Arial" pitchFamily="34" charset="0"/>
-                <a:ea typeface="Arial" pitchFamily="34" charset="-122"/>
-                <a:cs typeface="Arial" pitchFamily="34" charset="-120"/>
-              </a:rPr>
-              <a:t>Fork it, then add it as a project</a:t>
-            </a:r>
-            <a:endParaRPr lang="en-US" sz="2800" dirty="0"/>
-          </a:p>
-        </p:txBody>
-      </p:sp>
-      <p:sp>
-        <p:nvSpPr>
-          <p:cNvPr id="8" name="Text 4"/>
-          <p:cNvSpPr/>
-          <p:nvPr/>
-        </p:nvSpPr>
-        <p:spPr>
-          <a:xfrm>
-            <a:off x="507950" y="1104751"/>
-            <a:ext cx="8161020" cy="254050"/>
-          </a:xfrm>
-          <a:prstGeom prst="rect">
-            <a:avLst/>
-          </a:prstGeom>
-          <a:noFill/>
-          <a:ln/>
-        </p:spPr>
-        <p:txBody>
-          <a:bodyPr wrap="square" lIns="0" tIns="0" rIns="0" bIns="0" rtlCol="0" anchor="t"/>
-          <a:lstStyle/>
-          <a:p>
-            <a:pPr algn="l" indent="0" marL="0">
-              <a:lnSpc>
-                <a:spcPts val="2000"/>
-              </a:lnSpc>
-              <a:spcBef>
-                <a:spcPts val="500"/>
-              </a:spcBef>
-              <a:buNone/>
-            </a:pPr>
-            <a:r>
-              <a:rPr lang="en-US" sz="1650" dirty="0">
-                <a:solidFill>
-                  <a:srgbClr val="59636E"/>
-                </a:solidFill>
-                <a:latin typeface="Arial" pitchFamily="34" charset="0"/>
-                <a:ea typeface="Arial" pitchFamily="34" charset="-122"/>
-                <a:cs typeface="Arial" pitchFamily="34" charset="-120"/>
-              </a:rPr>
-              <a:t>A fork is your own copy of the course on GitHub.</a:t>
-            </a:r>
-            <a:endParaRPr lang="en-US" sz="1650" dirty="0"/>
-          </a:p>
-        </p:txBody>
-      </p:sp>
-      <p:sp>
-        <p:nvSpPr>
-          <p:cNvPr id="9" name="Text 5"/>
-          <p:cNvSpPr/>
-          <p:nvPr/>
-        </p:nvSpPr>
-        <p:spPr>
-          <a:xfrm>
-            <a:off x="507950" y="1770757"/>
-            <a:ext cx="279350" cy="279350"/>
-          </a:xfrm>
-          <a:prstGeom prst="roundRect">
-            <a:avLst>
-              <a:gd name="adj" fmla="val 327331"/>
-            </a:avLst>
-          </a:prstGeom>
-          <a:solidFill>
-            <a:srgbClr val="8250DF"/>
-          </a:solidFill>
-          <a:ln/>
-        </p:spPr>
-        <p:txBody>
-          <a:bodyPr wrap="square" rtlCol="0" anchor="ctr"/>
-          <a:lstStyle/>
-          <a:p>
-            <a:pPr indent="0" marL="0">
-              <a:buNone/>
-            </a:pPr>
-            <a:endParaRPr lang="en-US" dirty="0"/>
-          </a:p>
-        </p:txBody>
-      </p:sp>
-      <p:sp>
-        <p:nvSpPr>
-          <p:cNvPr id="10" name="Text 6"/>
-          <p:cNvSpPr/>
-          <p:nvPr/>
-        </p:nvSpPr>
-        <p:spPr>
-          <a:xfrm>
-            <a:off x="602615" y="1815108"/>
-            <a:ext cx="90020" cy="190500"/>
-          </a:xfrm>
-          <a:prstGeom prst="rect">
-            <a:avLst/>
-          </a:prstGeom>
-          <a:noFill/>
-          <a:ln/>
-        </p:spPr>
-        <p:txBody>
-          <a:bodyPr wrap="square" lIns="0" tIns="0" rIns="0" bIns="0" rtlCol="0" anchor="t"/>
-          <a:lstStyle/>
-          <a:p>
-            <a:pPr algn="ctr" indent="0" marL="0">
-              <a:buNone/>
-            </a:pPr>
-            <a:r>
-              <a:rPr lang="en-US" sz="1250" b="1" dirty="0">
-                <a:solidFill>
-                  <a:srgbClr val="FFFFFF"/>
-                </a:solidFill>
-                <a:latin typeface="Arial" pitchFamily="34" charset="0"/>
-                <a:ea typeface="Arial" pitchFamily="34" charset="-122"/>
-                <a:cs typeface="Arial" pitchFamily="34" charset="-120"/>
-              </a:rPr>
-              <a:t>1</a:t>
-            </a:r>
-            <a:endParaRPr lang="en-US" sz="1250" dirty="0"/>
-          </a:p>
-        </p:txBody>
-      </p:sp>
-      <p:sp>
-        <p:nvSpPr>
-          <p:cNvPr id="11" name="Text 7"/>
-          <p:cNvSpPr/>
-          <p:nvPr/>
-        </p:nvSpPr>
-        <p:spPr>
-          <a:xfrm>
-            <a:off x="939701" y="1770757"/>
-            <a:ext cx="3186684" cy="222200"/>
-          </a:xfrm>
-          <a:prstGeom prst="rect">
-            <a:avLst/>
-          </a:prstGeom>
-          <a:noFill/>
-          <a:ln/>
-        </p:spPr>
-        <p:txBody>
-          <a:bodyPr wrap="square" lIns="0" tIns="0" rIns="0" bIns="0" rtlCol="0" anchor="t"/>
-          <a:lstStyle/>
-          <a:p>
-            <a:pPr algn="l" indent="0" marL="0">
-              <a:lnSpc>
-                <a:spcPts val="1750"/>
-              </a:lnSpc>
-              <a:buNone/>
-            </a:pPr>
-            <a:r>
-              <a:rPr lang="en-US" sz="1550" b="1" dirty="0">
-                <a:solidFill>
-                  <a:srgbClr val="1F2328"/>
-                </a:solidFill>
-                <a:latin typeface="Arial" pitchFamily="34" charset="0"/>
-                <a:ea typeface="Arial" pitchFamily="34" charset="-122"/>
-                <a:cs typeface="Arial" pitchFamily="34" charset="-120"/>
-              </a:rPr>
-              <a:t>Fork the course</a:t>
-            </a:r>
-            <a:endParaRPr lang="en-US" sz="1550" dirty="0"/>
-          </a:p>
-        </p:txBody>
-      </p:sp>
-      <p:sp>
-        <p:nvSpPr>
-          <p:cNvPr id="12" name="Text 8"/>
-          <p:cNvSpPr/>
-          <p:nvPr/>
-        </p:nvSpPr>
-        <p:spPr>
-          <a:xfrm>
-            <a:off x="939701" y="2018258"/>
-            <a:ext cx="3186684" cy="613321"/>
-          </a:xfrm>
-          <a:prstGeom prst="rect">
-            <a:avLst/>
-          </a:prstGeom>
-          <a:noFill/>
-          <a:ln/>
-        </p:spPr>
-        <p:txBody>
-          <a:bodyPr wrap="square" lIns="0" tIns="0" rIns="0" bIns="0" rtlCol="0" anchor="t"/>
-          <a:lstStyle/>
-          <a:p>
-            <a:pPr algn="l" indent="0" marL="0">
-              <a:lnSpc>
-                <a:spcPts val="1560"/>
-              </a:lnSpc>
-              <a:buNone/>
-            </a:pPr>
-            <a:r>
-              <a:rPr lang="en-US" sz="1350" dirty="0">
-                <a:solidFill>
-                  <a:srgbClr val="59636E"/>
-                </a:solidFill>
-                <a:latin typeface="Arial" pitchFamily="34" charset="0"/>
-                <a:ea typeface="Arial" pitchFamily="34" charset="-122"/>
-                <a:cs typeface="Arial" pitchFamily="34" charset="-120"/>
-              </a:rPr>
-              <a:t>On GitHub.com, fork </a:t>
-            </a:r>
-            <a:pPr algn="l" indent="0" marL="0">
-              <a:lnSpc>
-                <a:spcPts val="1560"/>
-              </a:lnSpc>
-              <a:buNone/>
-            </a:pPr>
-            <a:r>
-              <a:rPr lang="en-US" sz="1350" b="1" dirty="0">
-                <a:solidFill>
-                  <a:srgbClr val="0550AE"/>
-                </a:solidFill>
-                <a:latin typeface="Courier New" pitchFamily="34" charset="0"/>
-                <a:ea typeface="Courier New" pitchFamily="34" charset="-122"/>
-                <a:cs typeface="Courier New" pitchFamily="34" charset="-120"/>
-              </a:rPr>
-              <a:t>github/copilot-app-for-beginners</a:t>
-            </a:r>
-            <a:pPr algn="l" indent="0" marL="0">
-              <a:lnSpc>
-                <a:spcPts val="1560"/>
-              </a:lnSpc>
-              <a:buNone/>
-            </a:pPr>
-            <a:r>
-              <a:rPr lang="en-US" sz="1350" dirty="0">
-                <a:solidFill>
-                  <a:srgbClr val="59636E"/>
-                </a:solidFill>
-                <a:latin typeface="Arial" pitchFamily="34" charset="0"/>
-                <a:ea typeface="Arial" pitchFamily="34" charset="-122"/>
-                <a:cs typeface="Arial" pitchFamily="34" charset="-120"/>
-              </a:rPr>
-              <a:t>.</a:t>
-            </a:r>
-            <a:endParaRPr lang="en-US" sz="1350" dirty="0"/>
-          </a:p>
-        </p:txBody>
-      </p:sp>
-      <p:sp>
-        <p:nvSpPr>
-          <p:cNvPr id="13" name="Text 9"/>
-          <p:cNvSpPr/>
-          <p:nvPr/>
-        </p:nvSpPr>
-        <p:spPr>
-          <a:xfrm>
-            <a:off x="507950" y="2885480"/>
-            <a:ext cx="279350" cy="279350"/>
-          </a:xfrm>
-          <a:prstGeom prst="roundRect">
-            <a:avLst>
-              <a:gd name="adj" fmla="val 327331"/>
-            </a:avLst>
-          </a:prstGeom>
-          <a:solidFill>
-            <a:srgbClr val="8250DF"/>
-          </a:solidFill>
-          <a:ln/>
-        </p:spPr>
-        <p:txBody>
-          <a:bodyPr wrap="square" rtlCol="0" anchor="ctr"/>
-          <a:lstStyle/>
-          <a:p>
-            <a:pPr indent="0" marL="0">
-              <a:buNone/>
-            </a:pPr>
-            <a:endParaRPr lang="en-US" dirty="0"/>
-          </a:p>
-        </p:txBody>
-      </p:sp>
-      <p:sp>
-        <p:nvSpPr>
-          <p:cNvPr id="14" name="Text 10"/>
-          <p:cNvSpPr/>
-          <p:nvPr/>
-        </p:nvSpPr>
-        <p:spPr>
-          <a:xfrm>
-            <a:off x="602615" y="2929830"/>
-            <a:ext cx="90020" cy="190500"/>
-          </a:xfrm>
-          <a:prstGeom prst="rect">
-            <a:avLst/>
-          </a:prstGeom>
-          <a:noFill/>
-          <a:ln/>
-        </p:spPr>
-        <p:txBody>
-          <a:bodyPr wrap="square" lIns="0" tIns="0" rIns="0" bIns="0" rtlCol="0" anchor="t"/>
-          <a:lstStyle/>
-          <a:p>
-            <a:pPr algn="ctr" indent="0" marL="0">
-              <a:buNone/>
-            </a:pPr>
-            <a:r>
-              <a:rPr lang="en-US" sz="1250" b="1" dirty="0">
-                <a:solidFill>
-                  <a:srgbClr val="FFFFFF"/>
-                </a:solidFill>
-                <a:latin typeface="Arial" pitchFamily="34" charset="0"/>
-                <a:ea typeface="Arial" pitchFamily="34" charset="-122"/>
-                <a:cs typeface="Arial" pitchFamily="34" charset="-120"/>
-              </a:rPr>
-              <a:t>2</a:t>
-            </a:r>
-            <a:endParaRPr lang="en-US" sz="1250" dirty="0"/>
-          </a:p>
-        </p:txBody>
-      </p:sp>
-      <p:sp>
-        <p:nvSpPr>
-          <p:cNvPr id="15" name="Text 11"/>
-          <p:cNvSpPr/>
-          <p:nvPr/>
-        </p:nvSpPr>
-        <p:spPr>
-          <a:xfrm>
-            <a:off x="939701" y="2885480"/>
-            <a:ext cx="3186684" cy="222200"/>
-          </a:xfrm>
-          <a:prstGeom prst="rect">
-            <a:avLst/>
-          </a:prstGeom>
-          <a:noFill/>
-          <a:ln/>
-        </p:spPr>
-        <p:txBody>
-          <a:bodyPr wrap="square" lIns="0" tIns="0" rIns="0" bIns="0" rtlCol="0" anchor="t"/>
-          <a:lstStyle/>
-          <a:p>
-            <a:pPr algn="l" indent="0" marL="0">
-              <a:lnSpc>
-                <a:spcPts val="1750"/>
-              </a:lnSpc>
-              <a:buNone/>
-            </a:pPr>
-            <a:r>
-              <a:rPr lang="en-US" sz="1550" b="1" dirty="0">
-                <a:solidFill>
-                  <a:srgbClr val="1F2328"/>
-                </a:solidFill>
-                <a:latin typeface="Arial" pitchFamily="34" charset="0"/>
-                <a:ea typeface="Arial" pitchFamily="34" charset="-122"/>
-                <a:cs typeface="Arial" pitchFamily="34" charset="-120"/>
-              </a:rPr>
-              <a:t>Add it to the app</a:t>
-            </a:r>
-            <a:endParaRPr lang="en-US" sz="1550" dirty="0"/>
-          </a:p>
-        </p:txBody>
-      </p:sp>
-      <p:sp>
-        <p:nvSpPr>
-          <p:cNvPr id="16" name="Text 12"/>
-          <p:cNvSpPr/>
-          <p:nvPr/>
-        </p:nvSpPr>
-        <p:spPr>
-          <a:xfrm>
-            <a:off x="939701" y="3132981"/>
-            <a:ext cx="3186684" cy="396180"/>
-          </a:xfrm>
-          <a:prstGeom prst="rect">
-            <a:avLst/>
-          </a:prstGeom>
-          <a:noFill/>
-          <a:ln/>
-        </p:spPr>
-        <p:txBody>
-          <a:bodyPr wrap="square" lIns="0" tIns="0" rIns="0" bIns="0" rtlCol="0" anchor="t"/>
-          <a:lstStyle/>
-          <a:p>
-            <a:pPr algn="l" indent="0" marL="0">
-              <a:lnSpc>
-                <a:spcPts val="1560"/>
-              </a:lnSpc>
-              <a:buNone/>
-            </a:pPr>
-            <a:r>
-              <a:rPr lang="en-US" sz="1350" dirty="0">
-                <a:solidFill>
-                  <a:srgbClr val="59636E"/>
-                </a:solidFill>
-                <a:latin typeface="Arial" pitchFamily="34" charset="0"/>
-                <a:ea typeface="Arial" pitchFamily="34" charset="-122"/>
-                <a:cs typeface="Arial" pitchFamily="34" charset="-120"/>
-              </a:rPr>
-              <a:t>Select </a:t>
-            </a:r>
-            <a:pPr algn="l" indent="0" marL="0">
-              <a:lnSpc>
-                <a:spcPts val="1560"/>
-              </a:lnSpc>
-              <a:buNone/>
-            </a:pPr>
-            <a:r>
-              <a:rPr lang="en-US" sz="1350" b="1" dirty="0">
-                <a:solidFill>
-                  <a:srgbClr val="59636E"/>
-                </a:solidFill>
-                <a:latin typeface="Arial" pitchFamily="34" charset="0"/>
-                <a:ea typeface="Arial" pitchFamily="34" charset="-122"/>
-                <a:cs typeface="Arial" pitchFamily="34" charset="-120"/>
-              </a:rPr>
-              <a:t>+</a:t>
-            </a:r>
-            <a:pPr algn="l" indent="0" marL="0">
-              <a:lnSpc>
-                <a:spcPts val="1560"/>
-              </a:lnSpc>
-              <a:buNone/>
-            </a:pPr>
-            <a:r>
-              <a:rPr lang="en-US" sz="1350" dirty="0">
-                <a:solidFill>
-                  <a:srgbClr val="59636E"/>
-                </a:solidFill>
-                <a:latin typeface="Arial" pitchFamily="34" charset="0"/>
-                <a:ea typeface="Arial" pitchFamily="34" charset="-122"/>
-                <a:cs typeface="Arial" pitchFamily="34" charset="-120"/>
-              </a:rPr>
-              <a:t> (1), then </a:t>
-            </a:r>
-            <a:pPr algn="l" indent="0" marL="0">
-              <a:lnSpc>
-                <a:spcPts val="1560"/>
-              </a:lnSpc>
-              <a:buNone/>
-            </a:pPr>
-            <a:r>
-              <a:rPr lang="en-US" sz="1350" b="1" dirty="0">
-                <a:solidFill>
-                  <a:srgbClr val="59636E"/>
-                </a:solidFill>
-                <a:latin typeface="Arial" pitchFamily="34" charset="0"/>
-                <a:ea typeface="Arial" pitchFamily="34" charset="-122"/>
-                <a:cs typeface="Arial" pitchFamily="34" charset="-120"/>
-              </a:rPr>
-              <a:t>Add GitHub repository</a:t>
-            </a:r>
-            <a:pPr algn="l" indent="0" marL="0">
-              <a:lnSpc>
-                <a:spcPts val="1560"/>
-              </a:lnSpc>
-              <a:buNone/>
-            </a:pPr>
-            <a:r>
-              <a:rPr lang="en-US" sz="1350" dirty="0">
-                <a:solidFill>
-                  <a:srgbClr val="59636E"/>
-                </a:solidFill>
-                <a:latin typeface="Arial" pitchFamily="34" charset="0"/>
-                <a:ea typeface="Arial" pitchFamily="34" charset="-122"/>
-                <a:cs typeface="Arial" pitchFamily="34" charset="-120"/>
-              </a:rPr>
-              <a:t> (2).</a:t>
-            </a:r>
-            <a:endParaRPr lang="en-US" sz="1350" dirty="0"/>
-          </a:p>
-        </p:txBody>
-      </p:sp>
-      <p:sp>
-        <p:nvSpPr>
-          <p:cNvPr id="17" name="Text 13"/>
-          <p:cNvSpPr/>
-          <p:nvPr/>
-        </p:nvSpPr>
-        <p:spPr>
-          <a:xfrm>
-            <a:off x="507950" y="3783062"/>
-            <a:ext cx="279350" cy="279350"/>
-          </a:xfrm>
-          <a:prstGeom prst="roundRect">
-            <a:avLst>
-              <a:gd name="adj" fmla="val 327331"/>
-            </a:avLst>
-          </a:prstGeom>
-          <a:solidFill>
-            <a:srgbClr val="8250DF"/>
-          </a:solidFill>
-          <a:ln/>
-        </p:spPr>
-        <p:txBody>
-          <a:bodyPr wrap="square" rtlCol="0" anchor="ctr"/>
-          <a:lstStyle/>
-          <a:p>
-            <a:pPr indent="0" marL="0">
-              <a:buNone/>
-            </a:pPr>
-            <a:endParaRPr lang="en-US" dirty="0"/>
-          </a:p>
-        </p:txBody>
-      </p:sp>
-      <p:sp>
-        <p:nvSpPr>
-          <p:cNvPr id="18" name="Text 14"/>
-          <p:cNvSpPr/>
-          <p:nvPr/>
-        </p:nvSpPr>
-        <p:spPr>
-          <a:xfrm>
-            <a:off x="602615" y="3827413"/>
-            <a:ext cx="90020" cy="190500"/>
-          </a:xfrm>
-          <a:prstGeom prst="rect">
-            <a:avLst/>
-          </a:prstGeom>
-          <a:noFill/>
-          <a:ln/>
-        </p:spPr>
-        <p:txBody>
-          <a:bodyPr wrap="square" lIns="0" tIns="0" rIns="0" bIns="0" rtlCol="0" anchor="t"/>
-          <a:lstStyle/>
-          <a:p>
-            <a:pPr algn="ctr" indent="0" marL="0">
-              <a:buNone/>
-            </a:pPr>
-            <a:r>
-              <a:rPr lang="en-US" sz="1250" b="1" dirty="0">
-                <a:solidFill>
-                  <a:srgbClr val="FFFFFF"/>
-                </a:solidFill>
-                <a:latin typeface="Arial" pitchFamily="34" charset="0"/>
-                <a:ea typeface="Arial" pitchFamily="34" charset="-122"/>
-                <a:cs typeface="Arial" pitchFamily="34" charset="-120"/>
-              </a:rPr>
-              <a:t>3</a:t>
-            </a:r>
-            <a:endParaRPr lang="en-US" sz="1250" dirty="0"/>
-          </a:p>
-        </p:txBody>
-      </p:sp>
-      <p:sp>
-        <p:nvSpPr>
-          <p:cNvPr id="19" name="Text 15"/>
-          <p:cNvSpPr/>
-          <p:nvPr/>
-        </p:nvSpPr>
-        <p:spPr>
-          <a:xfrm>
-            <a:off x="939701" y="3783062"/>
-            <a:ext cx="3186684" cy="222200"/>
-          </a:xfrm>
-          <a:prstGeom prst="rect">
-            <a:avLst/>
-          </a:prstGeom>
-          <a:noFill/>
-          <a:ln/>
-        </p:spPr>
-        <p:txBody>
-          <a:bodyPr wrap="square" lIns="0" tIns="0" rIns="0" bIns="0" rtlCol="0" anchor="t"/>
-          <a:lstStyle/>
-          <a:p>
-            <a:pPr algn="l" indent="0" marL="0">
-              <a:lnSpc>
-                <a:spcPts val="1750"/>
-              </a:lnSpc>
-              <a:buNone/>
-            </a:pPr>
-            <a:r>
-              <a:rPr lang="en-US" sz="1550" b="1" dirty="0">
-                <a:solidFill>
-                  <a:srgbClr val="1F2328"/>
-                </a:solidFill>
-                <a:latin typeface="Arial" pitchFamily="34" charset="0"/>
-                <a:ea typeface="Arial" pitchFamily="34" charset="-122"/>
-                <a:cs typeface="Arial" pitchFamily="34" charset="-120"/>
-              </a:rPr>
-              <a:t>Select your fork</a:t>
-            </a:r>
-            <a:endParaRPr lang="en-US" sz="1550" dirty="0"/>
-          </a:p>
-        </p:txBody>
-      </p:sp>
-      <p:sp>
-        <p:nvSpPr>
-          <p:cNvPr id="20" name="Text 16"/>
-          <p:cNvSpPr/>
-          <p:nvPr/>
-        </p:nvSpPr>
-        <p:spPr>
-          <a:xfrm>
-            <a:off x="939701" y="4030563"/>
-            <a:ext cx="3186684" cy="396180"/>
-          </a:xfrm>
-          <a:prstGeom prst="rect">
-            <a:avLst/>
-          </a:prstGeom>
-          <a:noFill/>
-          <a:ln/>
-        </p:spPr>
-        <p:txBody>
-          <a:bodyPr wrap="square" lIns="0" tIns="0" rIns="0" bIns="0" rtlCol="0" anchor="t"/>
-          <a:lstStyle/>
-          <a:p>
-            <a:pPr algn="l" indent="0" marL="0">
-              <a:lnSpc>
-                <a:spcPts val="1560"/>
-              </a:lnSpc>
-              <a:buNone/>
-            </a:pPr>
-            <a:r>
-              <a:rPr lang="en-US" sz="1350" dirty="0">
-                <a:solidFill>
-                  <a:srgbClr val="59636E"/>
-                </a:solidFill>
-                <a:latin typeface="Arial" pitchFamily="34" charset="0"/>
-                <a:ea typeface="Arial" pitchFamily="34" charset="-122"/>
-                <a:cs typeface="Arial" pitchFamily="34" charset="-120"/>
-              </a:rPr>
-              <a:t>The result that starts with your username.</a:t>
-            </a:r>
-            <a:endParaRPr lang="en-US" sz="1350" dirty="0"/>
-          </a:p>
-        </p:txBody>
-      </p:sp>
-      <p:sp>
-        <p:nvSpPr>
-          <p:cNvPr id="21" name="Text 17"/>
-          <p:cNvSpPr/>
-          <p:nvPr/>
-        </p:nvSpPr>
-        <p:spPr>
-          <a:xfrm>
-            <a:off x="4320927" y="1579811"/>
-            <a:ext cx="4311551" cy="3037731"/>
-          </a:xfrm>
-          <a:prstGeom prst="roundRect">
-            <a:avLst>
-              <a:gd name="adj" fmla="val 2508"/>
-            </a:avLst>
-          </a:prstGeom>
-          <a:solidFill>
-            <a:srgbClr val="FFFFFF"/>
-          </a:solidFill>
-          <a:ln w="9525">
-            <a:solidFill>
-              <a:srgbClr val="D1D9E0"/>
-            </a:solidFill>
-          </a:ln>
-          <a:effectLst>
-            <a:outerShdw sx="100000" sy="100000" kx="0" ky="0" algn="bl" rotWithShape="0" blurRad="38100" dist="9525" dir="5400000">
-              <a:srgbClr val="1f2328">
-                <a:alpha val="12000"/>
-              </a:srgbClr>
-            </a:outerShdw>
-          </a:effectLst>
-        </p:spPr>
-        <p:txBody>
-          <a:bodyPr wrap="square" rtlCol="0" anchor="ctr"/>
-          <a:lstStyle/>
-          <a:p>
-            <a:pPr indent="0" marL="0">
-              <a:buNone/>
-            </a:pPr>
-            <a:endParaRPr lang="en-US" dirty="0"/>
-          </a:p>
-        </p:txBody>
-      </p:sp>
-      <p:pic>
-        <p:nvPicPr>
-          <p:cNvPr id="22" name="Image 2" descr="Projects menu with callouts for + and Add GitHub repository">    </p:cNvPr>
-          <p:cNvPicPr>
-            <a:picLocks noChangeAspect="1"/>
-          </p:cNvPicPr>
-          <p:nvPr/>
-        </p:nvPicPr>
-        <p:blipFill>
-          <a:blip r:embed="rId4"/>
-          <a:stretch>
-            <a:fillRect/>
-          </a:stretch>
-        </p:blipFill>
-        <p:spPr>
-          <a:xfrm>
-            <a:off x="4368552" y="1627436"/>
-            <a:ext cx="4216301" cy="2942481"/>
-          </a:xfrm>
-          <a:prstGeom prst="rect">
-            <a:avLst/>
-          </a:prstGeom>
-        </p:spPr>
-      </p:pic>
-    </p:spTree>
-  </p:cSld>
-  <p:clrMapOvr>
-    <a:masterClrMapping/>
-  </p:clrMapOvr>
-</p:sld>
+<ns0:sld xmlns:ns0="http://schemas.openxmlformats.org/presentationml/2006/main" xmlns:ns1="http://schemas.openxmlformats.org/drawingml/2006/main" xmlns:ns2="http://schemas.microsoft.com/office/drawing/2017/decorative" xmlns:ns3="http://schemas.openxmlformats.org/officeDocument/2006/relationships">
+  <ns0:cSld name="Slide 8">
+    <ns0:bg>
+      <ns0:bgPr>
+        <ns1:solidFill>
+          <ns1:srgbClr val="FFFFFF"/>
+        </ns1:solidFill>
+      </ns0:bgPr>
+    </ns0:bg>
+    <ns0:spTree>
+      <ns0:nvGrpSpPr>
+        <ns0:cNvPr id="1" name=""/>
+        <ns0:cNvGrpSpPr/>
+        <ns0:nvPr/>
+      </ns0:nvGrpSpPr>
+      <ns0:grpSpPr>
+        <ns1:xfrm>
+          <ns1:off x="0" y="0"/>
+          <ns1:ext cx="0" cy="0"/>
+          <ns1:chOff x="0" y="0"/>
+          <ns1:chExt cx="0" cy="0"/>
+        </ns1:xfrm>
+      </ns0:grpSpPr>
+      <ns0:pic>
+        <ns0:nvPicPr>
+          <ns0:cNvPr id="2" name="Image 0" descr="">
+            <ns1:extLst>
+              <ns1:ext uri="{C183D7F6-B498-43B3-948B-1728B52AA6E4}">
+                <ns2:decorative val="1"/>
+              </ns1:ext>
+            </ns1:extLst>
+          </ns0:cNvPr>
+          <ns0:cNvPicPr>
+            <ns1:picLocks noChangeAspect="1"/>
+          </ns0:cNvPicPr>
+          <ns0:nvPr/>
+        </ns0:nvPicPr>
+        <ns0:blipFill>
+          <ns1:blip ns3:embed="rId1"/>
+          <ns1:stretch>
+            <ns1:fillRect/>
+          </ns1:stretch>
+        </ns0:blipFill>
+        <ns0:spPr>
+          <ns1:xfrm>
+            <ns1:off x="6349901" y="0"/>
+            <ns1:ext cx="2793950" cy="1308050"/>
+          </ns1:xfrm>
+          <ns1:prstGeom prst="rect">
+            <ns1:avLst/>
+          </ns1:prstGeom>
+        </ns0:spPr>
+      </ns0:pic>
+      <ns0:sp>
+        <ns0:nvSpPr>
+          <ns0:cNvPr id="3" name="Text 0"/>
+          <ns0:cNvSpPr/>
+          <ns0:nvPr/>
+        </ns0:nvSpPr>
+        <ns0:spPr>
+          <ns1:xfrm>
+            <ns1:off x="7340501" y="177701"/>
+            <ns1:ext cx="1168301" cy="279350"/>
+          </ns1:xfrm>
+          <ns1:prstGeom prst="roundRect">
+            <ns1:avLst>
+              <ns1:gd name="adj" fmla="val 22731"/>
+            </ns1:avLst>
+          </ns1:prstGeom>
+          <ns1:solidFill>
+            <ns1:srgbClr val="1A7F37"/>
+          </ns1:solidFill>
+          <ns1:ln/>
+        </ns0:spPr>
+        <ns0:txBody>
+          <ns1:bodyPr wrap="square" rtlCol="0" anchor="ctr"/>
+          <ns1:lstStyle/>
+          <ns1:p>
+            <ns1:pPr indent="0" marL="0">
+              <ns1:buNone/>
+            </ns1:pPr>
+            <ns1:endParaRPr lang="en-US" dirty="0"/>
+          </ns1:p>
+        </ns0:txBody>
+      </ns0:sp>
+      <ns0:sp>
+        <ns0:nvSpPr>
+          <ns0:cNvPr id="4" name="Text 1"/>
+          <ns0:cNvSpPr/>
+          <ns0:nvPr/>
+        </ns0:nvSpPr>
+        <ns0:spPr>
+          <ns1:xfrm>
+            <ns1:off x="7461041" y="231577"/>
+            <ns1:ext cx="927071" cy="171450"/>
+          </ns1:xfrm>
+          <ns1:prstGeom prst="rect">
+            <ns1:avLst/>
+          </ns1:prstGeom>
+          <ns1:noFill/>
+          <ns1:ln/>
+        </ns0:spPr>
+        <ns0:txBody>
+          <ns1:bodyPr wrap="square" lIns="0" tIns="0" rIns="0" bIns="0" rtlCol="0" anchor="t"/>
+          <ns1:lstStyle/>
+          <ns1:p>
+            <ns1:pPr algn="ctr" indent="0" marL="0">
+              <ns1:buNone/>
+            </ns1:pPr>
+            <ns1:r>
+              <ns1:rPr lang="en-US" sz="1150" b="1" dirty="0">
+                <ns1:solidFill>
+                  <ns1:srgbClr val="FFFFFF"/>
+                </ns1:solidFill>
+                <ns1:latin typeface="Arial" pitchFamily="34" charset="0"/>
+                <ns1:ea typeface="Arial" pitchFamily="34" charset="-122"/>
+                <ns1:cs typeface="Arial" pitchFamily="34" charset="-120"/>
+              </ns1:rPr>
+              <ns1:t>CHAPTER 00</ns1:t>
+            </ns1:r>
+            <ns1:endParaRPr lang="en-US" sz="1150" dirty="0"/>
+          </ns1:p>
+        </ns0:txBody>
+      </ns0:sp>
+      <ns0:pic>
+        <ns0:nvPicPr>
+          <ns0:cNvPr id="5" name="Image 1" descr="Open this chapter on GitHub">
+            <ns1:hlinkClick ns3:id="rId3" tooltip="https://github.com/github/copilot-app-for-beginners/tree/main/00-setup"/>
+          </ns0:cNvPr>
+          <ns0:cNvPicPr>
+            <ns1:picLocks noChangeAspect="1"/>
+          </ns0:cNvPicPr>
+          <ns0:nvPr/>
+        </ns0:nvPicPr>
+        <ns0:blipFill>
+          <ns1:blip ns3:embed="rId2"/>
+          <ns1:stretch>
+            <ns1:fillRect/>
+          </ns1:stretch>
+        </ns0:blipFill>
+        <ns0:spPr>
+          <ns1:xfrm>
+            <ns1:off x="8610600" y="165050"/>
+            <ns1:ext cx="304800" cy="304800"/>
+          </ns1:xfrm>
+          <ns1:prstGeom prst="rect">
+            <ns1:avLst/>
+          </ns1:prstGeom>
+        </ns0:spPr>
+      </ns0:pic>
+      <ns0:sp>
+        <ns0:nvSpPr>
+          <ns0:cNvPr id="6" name="Text 2"/>
+          <ns0:cNvSpPr/>
+          <ns0:nvPr/>
+        </ns0:nvSpPr>
+        <ns0:spPr>
+          <ns1:xfrm>
+            <ns1:off x="507950" y="381000"/>
+            <ns1:ext cx="8161020" cy="190500"/>
+          </ns1:xfrm>
+          <ns1:prstGeom prst="rect">
+            <ns1:avLst/>
+          </ns1:prstGeom>
+          <ns1:noFill/>
+          <ns1:ln/>
+        </ns0:spPr>
+        <ns0:txBody>
+          <ns1:bodyPr wrap="square" lIns="0" tIns="0" rIns="0" bIns="0" rtlCol="0" anchor="t"/>
+          <ns1:lstStyle/>
+          <ns1:p>
+            <ns1:pPr algn="l" indent="0" marL="0">
+              <ns1:buNone/>
+            </ns1:pPr>
+            <ns1:r>
+              <ns1:rPr lang="en-US" sz="1250" b="1" dirty="0">
+                <ns1:solidFill>
+                  <ns1:srgbClr val="8250DF"/>
+                </ns1:solidFill>
+                <ns1:latin typeface="Arial" pitchFamily="34" charset="0"/>
+                <ns1:ea typeface="Arial" pitchFamily="34" charset="-122"/>
+                <ns1:cs typeface="Arial" pitchFamily="34" charset="-120"/>
+              </ns1:rPr>
+              <ns1:t>CONNECT YOUR REPOSITORY</ns1:t>
+            </ns1:r>
+            <ns1:endParaRPr lang="en-US" sz="1250" dirty="0"/>
+          </ns1:p>
+        </ns0:txBody>
+      </ns0:sp>
+      <ns0:sp>
+        <ns0:nvSpPr>
+          <ns0:cNvPr id="7" name="Text 3"/>
+          <ns0:cNvSpPr/>
+          <ns0:nvPr/>
+        </ns0:nvSpPr>
+        <ns0:spPr>
+          <ns1:xfrm>
+            <ns1:off x="507950" y="622250"/>
+            <ns1:ext cx="8161020" cy="419100"/>
+          </ns1:xfrm>
+          <ns1:prstGeom prst="rect">
+            <ns1:avLst/>
+          </ns1:prstGeom>
+          <ns1:noFill/>
+          <ns1:ln/>
+        </ns0:spPr>
+        <ns0:txBody>
+          <ns1:bodyPr wrap="square" lIns="0" tIns="0" rIns="0" bIns="0" rtlCol="0" anchor="t"/>
+          <ns1:lstStyle/>
+          <ns1:p>
+            <ns1:pPr algn="l" indent="0" marL="0">
+              <ns1:lnSpc>
+                <ns1:spcPts val="3300"/>
+              </ns1:lnSpc>
+              <ns1:spcBef>
+                <ns1:spcPts val="400"/>
+              </ns1:spcBef>
+              <ns1:buNone/>
+            </ns1:pPr>
+            <ns1:r>
+              <ns1:rPr lang="en-US" sz="2800" b="1" dirty="0">
+                <ns1:solidFill>
+                  <ns1:srgbClr val="1F2328"/>
+                </ns1:solidFill>
+                <ns1:latin typeface="Arial" pitchFamily="34" charset="0"/>
+                <ns1:ea typeface="Arial" pitchFamily="34" charset="-122"/>
+                <ns1:cs typeface="Arial" pitchFamily="34" charset="-120"/>
+              </ns1:rPr>
+              <ns1:t>Fork it, then add it as a repository</ns1:t>
+            </ns1:r>
+            <ns1:endParaRPr lang="en-US" sz="2800" dirty="0"/>
+          </ns1:p>
+        </ns0:txBody>
+      </ns0:sp>
+      <ns0:sp>
+        <ns0:nvSpPr>
+          <ns0:cNvPr id="8" name="Text 4"/>
+          <ns0:cNvSpPr/>
+          <ns0:nvPr/>
+        </ns0:nvSpPr>
+        <ns0:spPr>
+          <ns1:xfrm>
+            <ns1:off x="507950" y="1104751"/>
+            <ns1:ext cx="8161020" cy="254050"/>
+          </ns1:xfrm>
+          <ns1:prstGeom prst="rect">
+            <ns1:avLst/>
+          </ns1:prstGeom>
+          <ns1:noFill/>
+          <ns1:ln/>
+        </ns0:spPr>
+        <ns0:txBody>
+          <ns1:bodyPr wrap="square" lIns="0" tIns="0" rIns="0" bIns="0" rtlCol="0" anchor="t"/>
+          <ns1:lstStyle/>
+          <ns1:p>
+            <ns1:pPr algn="l" indent="0" marL="0">
+              <ns1:lnSpc>
+                <ns1:spcPts val="2000"/>
+              </ns1:lnSpc>
+              <ns1:spcBef>
+                <ns1:spcPts val="500"/>
+              </ns1:spcBef>
+              <ns1:buNone/>
+            </ns1:pPr>
+            <ns1:r>
+              <ns1:rPr lang="en-US" sz="1650" dirty="0">
+                <ns1:solidFill>
+                  <ns1:srgbClr val="59636E"/>
+                </ns1:solidFill>
+                <ns1:latin typeface="Arial" pitchFamily="34" charset="0"/>
+                <ns1:ea typeface="Arial" pitchFamily="34" charset="-122"/>
+                <ns1:cs typeface="Arial" pitchFamily="34" charset="-120"/>
+              </ns1:rPr>
+              <ns1:t>A fork is your own copy of the course on GitHub.</ns1:t>
+            </ns1:r>
+            <ns1:endParaRPr lang="en-US" sz="1650" dirty="0"/>
+          </ns1:p>
+        </ns0:txBody>
+      </ns0:sp>
+      <ns0:sp>
+        <ns0:nvSpPr>
+          <ns0:cNvPr id="9" name="Text 5"/>
+          <ns0:cNvSpPr/>
+          <ns0:nvPr/>
+        </ns0:nvSpPr>
+        <ns0:spPr>
+          <ns1:xfrm>
+            <ns1:off x="507950" y="1770757"/>
+            <ns1:ext cx="279350" cy="279350"/>
+          </ns1:xfrm>
+          <ns1:prstGeom prst="roundRect">
+            <ns1:avLst>
+              <ns1:gd name="adj" fmla="val 327331"/>
+            </ns1:avLst>
+          </ns1:prstGeom>
+          <ns1:solidFill>
+            <ns1:srgbClr val="8250DF"/>
+          </ns1:solidFill>
+          <ns1:ln/>
+        </ns0:spPr>
+        <ns0:txBody>
+          <ns1:bodyPr wrap="square" rtlCol="0" anchor="ctr"/>
+          <ns1:lstStyle/>
+          <ns1:p>
+            <ns1:pPr indent="0" marL="0">
+              <ns1:buNone/>
+            </ns1:pPr>
+            <ns1:endParaRPr lang="en-US" dirty="0"/>
+          </ns1:p>
+        </ns0:txBody>
+      </ns0:sp>
+      <ns0:sp>
+        <ns0:nvSpPr>
+          <ns0:cNvPr id="10" name="Text 6"/>
+          <ns0:cNvSpPr/>
+          <ns0:nvPr/>
+        </ns0:nvSpPr>
+        <ns0:spPr>
+          <ns1:xfrm>
+            <ns1:off x="602615" y="1815108"/>
+            <ns1:ext cx="90020" cy="190500"/>
+          </ns1:xfrm>
+          <ns1:prstGeom prst="rect">
+            <ns1:avLst/>
+          </ns1:prstGeom>
+          <ns1:noFill/>
+          <ns1:ln/>
+        </ns0:spPr>
+        <ns0:txBody>
+          <ns1:bodyPr wrap="square" lIns="0" tIns="0" rIns="0" bIns="0" rtlCol="0" anchor="t"/>
+          <ns1:lstStyle/>
+          <ns1:p>
+            <ns1:pPr algn="ctr" indent="0" marL="0">
+              <ns1:buNone/>
+            </ns1:pPr>
+            <ns1:r>
+              <ns1:rPr lang="en-US" sz="1250" b="1" dirty="0">
+                <ns1:solidFill>
+                  <ns1:srgbClr val="FFFFFF"/>
+                </ns1:solidFill>
+                <ns1:latin typeface="Arial" pitchFamily="34" charset="0"/>
+                <ns1:ea typeface="Arial" pitchFamily="34" charset="-122"/>
+                <ns1:cs typeface="Arial" pitchFamily="34" charset="-120"/>
+              </ns1:rPr>
+              <ns1:t>1</ns1:t>
+            </ns1:r>
+            <ns1:endParaRPr lang="en-US" sz="1250" dirty="0"/>
+          </ns1:p>
+        </ns0:txBody>
+      </ns0:sp>
+      <ns0:sp>
+        <ns0:nvSpPr>
+          <ns0:cNvPr id="11" name="Text 7"/>
+          <ns0:cNvSpPr/>
+          <ns0:nvPr/>
+        </ns0:nvSpPr>
+        <ns0:spPr>
+          <ns1:xfrm>
+            <ns1:off x="939701" y="1770757"/>
+            <ns1:ext cx="3186684" cy="222200"/>
+          </ns1:xfrm>
+          <ns1:prstGeom prst="rect">
+            <ns1:avLst/>
+          </ns1:prstGeom>
+          <ns1:noFill/>
+          <ns1:ln/>
+        </ns0:spPr>
+        <ns0:txBody>
+          <ns1:bodyPr wrap="square" lIns="0" tIns="0" rIns="0" bIns="0" rtlCol="0" anchor="t"/>
+          <ns1:lstStyle/>
+          <ns1:p>
+            <ns1:pPr algn="l" indent="0" marL="0">
+              <ns1:lnSpc>
+                <ns1:spcPts val="1750"/>
+              </ns1:lnSpc>
+              <ns1:buNone/>
+            </ns1:pPr>
+            <ns1:r>
+              <ns1:rPr lang="en-US" sz="1550" b="1" dirty="0">
+                <ns1:solidFill>
+                  <ns1:srgbClr val="1F2328"/>
+                </ns1:solidFill>
+                <ns1:latin typeface="Arial" pitchFamily="34" charset="0"/>
+                <ns1:ea typeface="Arial" pitchFamily="34" charset="-122"/>
+                <ns1:cs typeface="Arial" pitchFamily="34" charset="-120"/>
+              </ns1:rPr>
+              <ns1:t>Fork the course</ns1:t>
+            </ns1:r>
+            <ns1:endParaRPr lang="en-US" sz="1550" dirty="0"/>
+          </ns1:p>
+        </ns0:txBody>
+      </ns0:sp>
+      <ns0:sp>
+        <ns0:nvSpPr>
+          <ns0:cNvPr id="12" name="Text 8"/>
+          <ns0:cNvSpPr/>
+          <ns0:nvPr/>
+        </ns0:nvSpPr>
+        <ns0:spPr>
+          <ns1:xfrm>
+            <ns1:off x="939701" y="2018258"/>
+            <ns1:ext cx="3186684" cy="613321"/>
+          </ns1:xfrm>
+          <ns1:prstGeom prst="rect">
+            <ns1:avLst/>
+          </ns1:prstGeom>
+          <ns1:noFill/>
+          <ns1:ln/>
+        </ns0:spPr>
+        <ns0:txBody>
+          <ns1:bodyPr wrap="square" lIns="0" tIns="0" rIns="0" bIns="0" rtlCol="0" anchor="t"/>
+          <ns1:lstStyle/>
+          <ns1:p>
+            <ns1:pPr algn="l" indent="0" marL="0">
+              <ns1:lnSpc>
+                <ns1:spcPts val="1560"/>
+              </ns1:lnSpc>
+              <ns1:buNone/>
+            </ns1:pPr>
+            <ns1:r>
+              <ns1:rPr lang="en-US" sz="1350" dirty="0">
+                <ns1:solidFill>
+                  <ns1:srgbClr val="59636E"/>
+                </ns1:solidFill>
+                <ns1:latin typeface="Arial" pitchFamily="34" charset="0"/>
+                <ns1:ea typeface="Arial" pitchFamily="34" charset="-122"/>
+                <ns1:cs typeface="Arial" pitchFamily="34" charset="-120"/>
+              </ns1:rPr>
+              <ns1:t>On GitHub.com, fork </ns1:t>
+            </ns1:r>
+            <ns1:pPr algn="l" indent="0" marL="0">
+              <ns1:lnSpc>
+                <ns1:spcPts val="1560"/>
+              </ns1:lnSpc>
+              <ns1:buNone/>
+            </ns1:pPr>
+            <ns1:r>
+              <ns1:rPr lang="en-US" sz="1350" b="1" dirty="0">
+                <ns1:solidFill>
+                  <ns1:srgbClr val="0550AE"/>
+                </ns1:solidFill>
+                <ns1:latin typeface="Courier New" pitchFamily="34" charset="0"/>
+                <ns1:ea typeface="Courier New" pitchFamily="34" charset="-122"/>
+                <ns1:cs typeface="Courier New" pitchFamily="34" charset="-120"/>
+              </ns1:rPr>
+              <ns1:t>github/copilot-app-for-beginners</ns1:t>
+            </ns1:r>
+            <ns1:pPr algn="l" indent="0" marL="0">
+              <ns1:lnSpc>
+                <ns1:spcPts val="1560"/>
+              </ns1:lnSpc>
+              <ns1:buNone/>
+            </ns1:pPr>
+            <ns1:r>
+              <ns1:rPr lang="en-US" sz="1350" dirty="0">
+                <ns1:solidFill>
+                  <ns1:srgbClr val="59636E"/>
+                </ns1:solidFill>
+                <ns1:latin typeface="Arial" pitchFamily="34" charset="0"/>
+                <ns1:ea typeface="Arial" pitchFamily="34" charset="-122"/>
+                <ns1:cs typeface="Arial" pitchFamily="34" charset="-120"/>
+              </ns1:rPr>
+              <ns1:t>.</ns1:t>
+            </ns1:r>
+            <ns1:endParaRPr lang="en-US" sz="1350" dirty="0"/>
+          </ns1:p>
+        </ns0:txBody>
+      </ns0:sp>
+      <ns0:sp>
+        <ns0:nvSpPr>
+          <ns0:cNvPr id="13" name="Text 9"/>
+          <ns0:cNvSpPr/>
+          <ns0:nvPr/>
+        </ns0:nvSpPr>
+        <ns0:spPr>
+          <ns1:xfrm>
+            <ns1:off x="507950" y="2885480"/>
+            <ns1:ext cx="279350" cy="279350"/>
+          </ns1:xfrm>
+          <ns1:prstGeom prst="roundRect">
+            <ns1:avLst>
+              <ns1:gd name="adj" fmla="val 327331"/>
+            </ns1:avLst>
+          </ns1:prstGeom>
+          <ns1:solidFill>
+            <ns1:srgbClr val="8250DF"/>
+          </ns1:solidFill>
+          <ns1:ln/>
+        </ns0:spPr>
+        <ns0:txBody>
+          <ns1:bodyPr wrap="square" rtlCol="0" anchor="ctr"/>
+          <ns1:lstStyle/>
+          <ns1:p>
+            <ns1:pPr indent="0" marL="0">
+              <ns1:buNone/>
+            </ns1:pPr>
+            <ns1:endParaRPr lang="en-US" dirty="0"/>
+          </ns1:p>
+        </ns0:txBody>
+      </ns0:sp>
+      <ns0:sp>
+        <ns0:nvSpPr>
+          <ns0:cNvPr id="14" name="Text 10"/>
+          <ns0:cNvSpPr/>
+          <ns0:nvPr/>
+        </ns0:nvSpPr>
+        <ns0:spPr>
+          <ns1:xfrm>
+            <ns1:off x="602615" y="2929830"/>
+            <ns1:ext cx="90020" cy="190500"/>
+          </ns1:xfrm>
+          <ns1:prstGeom prst="rect">
+            <ns1:avLst/>
+          </ns1:prstGeom>
+          <ns1:noFill/>
+          <ns1:ln/>
+        </ns0:spPr>
+        <ns0:txBody>
+          <ns1:bodyPr wrap="square" lIns="0" tIns="0" rIns="0" bIns="0" rtlCol="0" anchor="t"/>
+          <ns1:lstStyle/>
+          <ns1:p>
+            <ns1:pPr algn="ctr" indent="0" marL="0">
+              <ns1:buNone/>
+            </ns1:pPr>
+            <ns1:r>
+              <ns1:rPr lang="en-US" sz="1250" b="1" dirty="0">
+                <ns1:solidFill>
+                  <ns1:srgbClr val="FFFFFF"/>
+                </ns1:solidFill>
+                <ns1:latin typeface="Arial" pitchFamily="34" charset="0"/>
+                <ns1:ea typeface="Arial" pitchFamily="34" charset="-122"/>
+                <ns1:cs typeface="Arial" pitchFamily="34" charset="-120"/>
+              </ns1:rPr>
+              <ns1:t>2</ns1:t>
+            </ns1:r>
+            <ns1:endParaRPr lang="en-US" sz="1250" dirty="0"/>
+          </ns1:p>
+        </ns0:txBody>
+      </ns0:sp>
+      <ns0:sp>
+        <ns0:nvSpPr>
+          <ns0:cNvPr id="15" name="Text 11"/>
+          <ns0:cNvSpPr/>
+          <ns0:nvPr/>
+        </ns0:nvSpPr>
+        <ns0:spPr>
+          <ns1:xfrm>
+            <ns1:off x="939701" y="2885480"/>
+            <ns1:ext cx="3186684" cy="222200"/>
+          </ns1:xfrm>
+          <ns1:prstGeom prst="rect">
+            <ns1:avLst/>
+          </ns1:prstGeom>
+          <ns1:noFill/>
+          <ns1:ln/>
+        </ns0:spPr>
+        <ns0:txBody>
+          <ns1:bodyPr wrap="square" lIns="0" tIns="0" rIns="0" bIns="0" rtlCol="0" anchor="t"/>
+          <ns1:lstStyle/>
+          <ns1:p>
+            <ns1:pPr algn="l" indent="0" marL="0">
+              <ns1:lnSpc>
+                <ns1:spcPts val="1750"/>
+              </ns1:lnSpc>
+              <ns1:buNone/>
+            </ns1:pPr>
+            <ns1:r>
+              <ns1:rPr lang="en-US" sz="1550" b="1" dirty="0">
+                <ns1:solidFill>
+                  <ns1:srgbClr val="1F2328"/>
+                </ns1:solidFill>
+                <ns1:latin typeface="Arial" pitchFamily="34" charset="0"/>
+                <ns1:ea typeface="Arial" pitchFamily="34" charset="-122"/>
+                <ns1:cs typeface="Arial" pitchFamily="34" charset="-120"/>
+              </ns1:rPr>
+              <ns1:t>Add it to the app</ns1:t>
+            </ns1:r>
+            <ns1:endParaRPr lang="en-US" sz="1550" dirty="0"/>
+          </ns1:p>
+        </ns0:txBody>
+      </ns0:sp>
+      <ns0:sp>
+        <ns0:nvSpPr>
+          <ns0:cNvPr id="16" name="Text 12"/>
+          <ns0:cNvSpPr/>
+          <ns0:nvPr/>
+        </ns0:nvSpPr>
+        <ns0:spPr>
+          <ns1:xfrm>
+            <ns1:off x="939701" y="3132981"/>
+            <ns1:ext cx="3186684" cy="396180"/>
+          </ns1:xfrm>
+          <ns1:prstGeom prst="rect">
+            <ns1:avLst/>
+          </ns1:prstGeom>
+          <ns1:noFill/>
+          <ns1:ln/>
+        </ns0:spPr>
+        <ns0:txBody>
+          <ns1:bodyPr wrap="square" lIns="0" tIns="0" rIns="0" bIns="0" rtlCol="0" anchor="t"/>
+          <ns1:lstStyle/>
+          <ns1:p>
+            <ns1:pPr algn="l" indent="0" marL="0">
+              <ns1:lnSpc>
+                <ns1:spcPts val="1560"/>
+              </ns1:lnSpc>
+              <ns1:buNone/>
+            </ns1:pPr>
+            <ns1:r>
+              <ns1:rPr lang="en-US" sz="1350" dirty="0">
+                <ns1:solidFill>
+                  <ns1:srgbClr val="59636E"/>
+                </ns1:solidFill>
+                <ns1:latin typeface="Arial" pitchFamily="34" charset="0"/>
+                <ns1:ea typeface="Arial" pitchFamily="34" charset="-122"/>
+                <ns1:cs typeface="Arial" pitchFamily="34" charset="-120"/>
+              </ns1:rPr>
+              <ns1:t>Select + (1), then Add GitHub repository (2).</ns1:t>
+            </ns1:r>
+            <ns1:pPr algn="l" indent="0" marL="0">
+              <ns1:lnSpc>
+                <ns1:spcPts val="1560"/>
+              </ns1:lnSpc>
+              <ns1:buNone/>
+            </ns1:pPr>
+            <ns1:r>
+              <ns1:rPr lang="en-US" sz="1350" b="1" dirty="0">
+                <ns1:solidFill>
+                  <ns1:srgbClr val="59636E"/>
+                </ns1:solidFill>
+                <ns1:latin typeface="Arial" pitchFamily="34" charset="0"/>
+                <ns1:ea typeface="Arial" pitchFamily="34" charset="-122"/>
+                <ns1:cs typeface="Arial" pitchFamily="34" charset="-120"/>
+              </ns1:rPr>
+              <ns1:t/>
+            </ns1:r>
+            <ns1:pPr algn="l" indent="0" marL="0">
+              <ns1:lnSpc>
+                <ns1:spcPts val="1560"/>
+              </ns1:lnSpc>
+              <ns1:buNone/>
+            </ns1:pPr>
+            <ns1:r>
+              <ns1:rPr lang="en-US" sz="1350" dirty="0">
+                <ns1:solidFill>
+                  <ns1:srgbClr val="59636E"/>
+                </ns1:solidFill>
+                <ns1:latin typeface="Arial" pitchFamily="34" charset="0"/>
+                <ns1:ea typeface="Arial" pitchFamily="34" charset="-122"/>
+                <ns1:cs typeface="Arial" pitchFamily="34" charset="-120"/>
+              </ns1:rPr>
+              <ns1:t/>
+            </ns1:r>
+            <ns1:pPr algn="l" indent="0" marL="0">
+              <ns1:lnSpc>
+                <ns1:spcPts val="1560"/>
+              </ns1:lnSpc>
+              <ns1:buNone/>
+            </ns1:pPr>
+            <ns1:r>
+              <ns1:rPr lang="en-US" sz="1350" b="1" dirty="0">
+                <ns1:solidFill>
+                  <ns1:srgbClr val="59636E"/>
+                </ns1:solidFill>
+                <ns1:latin typeface="Arial" pitchFamily="34" charset="0"/>
+                <ns1:ea typeface="Arial" pitchFamily="34" charset="-122"/>
+                <ns1:cs typeface="Arial" pitchFamily="34" charset="-120"/>
+              </ns1:rPr>
+              <ns1:t/>
+            </ns1:r>
+            <ns1:pPr algn="l" indent="0" marL="0">
+              <ns1:lnSpc>
+                <ns1:spcPts val="1560"/>
+              </ns1:lnSpc>
+              <ns1:buNone/>
+            </ns1:pPr>
+            <ns1:r>
+              <ns1:rPr lang="en-US" sz="1350" dirty="0">
+                <ns1:solidFill>
+                  <ns1:srgbClr val="59636E"/>
+                </ns1:solidFill>
+                <ns1:latin typeface="Arial" pitchFamily="34" charset="0"/>
+                <ns1:ea typeface="Arial" pitchFamily="34" charset="-122"/>
+                <ns1:cs typeface="Arial" pitchFamily="34" charset="-120"/>
+              </ns1:rPr>
+              <ns1:t/>
+            </ns1:r>
+            <ns1:endParaRPr lang="en-US" sz="1350" dirty="0"/>
+          </ns1:p>
+        </ns0:txBody>
+      </ns0:sp>
+      <ns0:sp>
+        <ns0:nvSpPr>
+          <ns0:cNvPr id="17" name="Text 13"/>
+          <ns0:cNvSpPr/>
+          <ns0:nvPr/>
+        </ns0:nvSpPr>
+        <ns0:spPr>
+          <ns1:xfrm>
+            <ns1:off x="507950" y="3783062"/>
+            <ns1:ext cx="279350" cy="279350"/>
+          </ns1:xfrm>
+          <ns1:prstGeom prst="roundRect">
+            <ns1:avLst>
+              <ns1:gd name="adj" fmla="val 327331"/>
+            </ns1:avLst>
+          </ns1:prstGeom>
+          <ns1:solidFill>
+            <ns1:srgbClr val="8250DF"/>
+          </ns1:solidFill>
+          <ns1:ln/>
+        </ns0:spPr>
+        <ns0:txBody>
+          <ns1:bodyPr wrap="square" rtlCol="0" anchor="ctr"/>
+          <ns1:lstStyle/>
+          <ns1:p>
+            <ns1:pPr indent="0" marL="0">
+              <ns1:buNone/>
+            </ns1:pPr>
+            <ns1:endParaRPr lang="en-US" dirty="0"/>
+          </ns1:p>
+        </ns0:txBody>
+      </ns0:sp>
+      <ns0:sp>
+        <ns0:nvSpPr>
+          <ns0:cNvPr id="18" name="Text 14"/>
+          <ns0:cNvSpPr/>
+          <ns0:nvPr/>
+        </ns0:nvSpPr>
+        <ns0:spPr>
+          <ns1:xfrm>
+            <ns1:off x="602615" y="3827413"/>
+            <ns1:ext cx="90020" cy="190500"/>
+          </ns1:xfrm>
+          <ns1:prstGeom prst="rect">
+            <ns1:avLst/>
+          </ns1:prstGeom>
+          <ns1:noFill/>
+          <ns1:ln/>
+        </ns0:spPr>
+        <ns0:txBody>
+          <ns1:bodyPr wrap="square" lIns="0" tIns="0" rIns="0" bIns="0" rtlCol="0" anchor="t"/>
+          <ns1:lstStyle/>
+          <ns1:p>
+            <ns1:pPr algn="ctr" indent="0" marL="0">
+              <ns1:buNone/>
+            </ns1:pPr>
+            <ns1:r>
+              <ns1:rPr lang="en-US" sz="1250" b="1" dirty="0">
+                <ns1:solidFill>
+                  <ns1:srgbClr val="FFFFFF"/>
+                </ns1:solidFill>
+                <ns1:latin typeface="Arial" pitchFamily="34" charset="0"/>
+                <ns1:ea typeface="Arial" pitchFamily="34" charset="-122"/>
+                <ns1:cs typeface="Arial" pitchFamily="34" charset="-120"/>
+              </ns1:rPr>
+              <ns1:t>3</ns1:t>
+            </ns1:r>
+            <ns1:endParaRPr lang="en-US" sz="1250" dirty="0"/>
+          </ns1:p>
+        </ns0:txBody>
+      </ns0:sp>
+      <ns0:sp>
+        <ns0:nvSpPr>
+          <ns0:cNvPr id="19" name="Text 15"/>
+          <ns0:cNvSpPr/>
+          <ns0:nvPr/>
+        </ns0:nvSpPr>
+        <ns0:spPr>
+          <ns1:xfrm>
+            <ns1:off x="939701" y="3783062"/>
+            <ns1:ext cx="3186684" cy="222200"/>
+          </ns1:xfrm>
+          <ns1:prstGeom prst="rect">
+            <ns1:avLst/>
+          </ns1:prstGeom>
+          <ns1:noFill/>
+          <ns1:ln/>
+        </ns0:spPr>
+        <ns0:txBody>
+          <ns1:bodyPr wrap="square" lIns="0" tIns="0" rIns="0" bIns="0" rtlCol="0" anchor="t"/>
+          <ns1:lstStyle/>
+          <ns1:p>
+            <ns1:pPr algn="l" indent="0" marL="0">
+              <ns1:lnSpc>
+                <ns1:spcPts val="1750"/>
+              </ns1:lnSpc>
+              <ns1:buNone/>
+            </ns1:pPr>
+            <ns1:r>
+              <ns1:rPr lang="en-US" sz="1550" b="1" dirty="0">
+                <ns1:solidFill>
+                  <ns1:srgbClr val="1F2328"/>
+                </ns1:solidFill>
+                <ns1:latin typeface="Arial" pitchFamily="34" charset="0"/>
+                <ns1:ea typeface="Arial" pitchFamily="34" charset="-122"/>
+                <ns1:cs typeface="Arial" pitchFamily="34" charset="-120"/>
+              </ns1:rPr>
+              <ns1:t>Select your fork</ns1:t>
+            </ns1:r>
+            <ns1:endParaRPr lang="en-US" sz="1550" dirty="0"/>
+          </ns1:p>
+        </ns0:txBody>
+      </ns0:sp>
+      <ns0:sp>
+        <ns0:nvSpPr>
+          <ns0:cNvPr id="20" name="Text 16"/>
+          <ns0:cNvSpPr/>
+          <ns0:nvPr/>
+        </ns0:nvSpPr>
+        <ns0:spPr>
+          <ns1:xfrm>
+            <ns1:off x="939701" y="4030563"/>
+            <ns1:ext cx="3186684" cy="396180"/>
+          </ns1:xfrm>
+          <ns1:prstGeom prst="rect">
+            <ns1:avLst/>
+          </ns1:prstGeom>
+          <ns1:noFill/>
+          <ns1:ln/>
+        </ns0:spPr>
+        <ns0:txBody>
+          <ns1:bodyPr wrap="square" lIns="0" tIns="0" rIns="0" bIns="0" rtlCol="0" anchor="t"/>
+          <ns1:lstStyle/>
+          <ns1:p>
+            <ns1:pPr algn="l" indent="0" marL="0">
+              <ns1:lnSpc>
+                <ns1:spcPts val="1560"/>
+              </ns1:lnSpc>
+              <ns1:buNone/>
+            </ns1:pPr>
+            <ns1:r>
+              <ns1:rPr lang="en-US" sz="1350" dirty="0">
+                <ns1:solidFill>
+                  <ns1:srgbClr val="59636E"/>
+                </ns1:solidFill>
+                <ns1:latin typeface="Arial" pitchFamily="34" charset="0"/>
+                <ns1:ea typeface="Arial" pitchFamily="34" charset="-122"/>
+                <ns1:cs typeface="Arial" pitchFamily="34" charset="-120"/>
+              </ns1:rPr>
+              <ns1:t>The result that starts with your username.</ns1:t>
+            </ns1:r>
+            <ns1:endParaRPr lang="en-US" sz="1350" dirty="0"/>
+          </ns1:p>
+        </ns0:txBody>
+      </ns0:sp>
+      <ns0:sp>
+        <ns0:nvSpPr>
+          <ns0:cNvPr id="21" name="Text 17"/>
+          <ns0:cNvSpPr/>
+          <ns0:nvPr/>
+        </ns0:nvSpPr>
+        <ns0:spPr>
+          <ns1:xfrm>
+            <ns1:off x="4320927" y="1579811"/>
+            <ns1:ext cx="4311551" cy="3037731"/>
+          </ns1:xfrm>
+          <ns1:prstGeom prst="roundRect">
+            <ns1:avLst>
+              <ns1:gd name="adj" fmla="val 2508"/>
+            </ns1:avLst>
+          </ns1:prstGeom>
+          <ns1:solidFill>
+            <ns1:srgbClr val="FFFFFF"/>
+          </ns1:solidFill>
+          <ns1:ln w="9525">
+            <ns1:solidFill>
+              <ns1:srgbClr val="D1D9E0"/>
+            </ns1:solidFill>
+          </ns1:ln>
+          <ns1:effectLst>
+            <ns1:outerShdw sx="100000" sy="100000" kx="0" ky="0" algn="bl" rotWithShape="0" blurRad="38100" dist="9525" dir="5400000">
+              <ns1:srgbClr val="1f2328">
+                <ns1:alpha val="12000"/>
+              </ns1:srgbClr>
+            </ns1:outerShdw>
+          </ns1:effectLst>
+        </ns0:spPr>
+        <ns0:txBody>
+          <ns1:bodyPr wrap="square" rtlCol="0" anchor="ctr"/>
+          <ns1:lstStyle/>
+          <ns1:p>
+            <ns1:pPr indent="0" marL="0">
+              <ns1:buNone/>
+            </ns1:pPr>
+            <ns1:endParaRPr lang="en-US" dirty="0"/>
+          </ns1:p>
+        </ns0:txBody>
+      </ns0:sp>
+      <ns0:pic>
+        <ns0:nvPicPr>
+          <ns0:cNvPr id="22" name="Image 2" descr="Sessions menu with callouts for + and Add GitHub repository"/>
+          <ns0:cNvPicPr>
+            <ns1:picLocks noChangeAspect="1"/>
+          </ns0:cNvPicPr>
+          <ns0:nvPr/>
+        </ns0:nvPicPr>
+        <ns0:blipFill>
+          <ns1:blip ns3:embed="rId4"/>
+          <ns1:stretch>
+            <ns1:fillRect/>
+          </ns1:stretch>
+        </ns0:blipFill>
+        <ns0:spPr>
+          <ns1:xfrm>
+            <ns1:off x="4368552" y="1627436"/>
+            <ns1:ext cx="4216301" cy="2942481"/>
+          </ns1:xfrm>
+          <ns1:prstGeom prst="rect">
+            <ns1:avLst/>
+          </ns1:prstGeom>
+        </ns0:spPr>
+      </ns0:pic>
+    </ns0:spTree>
+  </ns0:cSld>
+  <ns0:clrMapOvr>
+    <ns1:masterClrMapping/>
+  </ns0:clrMapOvr>
+</ns0:sld>
 </file>
 
 <file path=ppt/slides/slide9.xml><?xml version="1.0" encoding="utf-8"?>
@@ -13404,7 +13404,7 @@
       </p:sp>
       <p:pic>
         <p:nvPicPr>
-          <p:cNvPr id="10" name="Image 2" descr="Where to work menu with callouts for the workspace selector and Current checkout">    </p:cNvPr>
+          <p:cNvPr id="10" name="Image 2" descr="Where to work menu with callouts for the workspace selector and Current checkout"/>
           <p:cNvPicPr>
             <a:picLocks noChangeAspect="1"/>
           </p:cNvPicPr>

--- a/slides/00-setup.pptx
+++ b/slides/00-setup.pptx
@@ -2591,7 +2591,7 @@
         </p:nvSpPr>
         <p:spPr>
           <a:xfrm>
-            <a:off x="711101" y="1571774"/>
+            <a:off x="711101" y="1937534"/>
             <a:ext cx="5570169" cy="209550"/>
           </a:xfrm>
           <a:prstGeom prst="rect">
@@ -2630,7 +2630,7 @@
         </p:nvSpPr>
         <p:spPr>
           <a:xfrm>
-            <a:off x="711101" y="1882825"/>
+            <a:off x="711101" y="2248585"/>
             <a:ext cx="5570169" cy="584150"/>
           </a:xfrm>
           <a:prstGeom prst="rect">
@@ -2675,7 +2675,7 @@
         </p:nvSpPr>
         <p:spPr>
           <a:xfrm>
-            <a:off x="711101" y="2670125"/>
+            <a:off x="711101" y="3035885"/>
             <a:ext cx="609600" cy="63401"/>
           </a:xfrm>
           <a:prstGeom prst="roundRect">
@@ -2696,48 +2696,6 @@
               <a:buNone/>
             </a:pPr>
             <a:endParaRPr lang="en-US" dirty="0"/>
-          </a:p>
-        </p:txBody>
-      </p:sp>
-      <p:sp>
-        <p:nvSpPr>
-          <p:cNvPr id="12" name="Text 8"/>
-          <p:cNvSpPr/>
-          <p:nvPr/>
-        </p:nvSpPr>
-        <p:spPr>
-          <a:xfrm>
-            <a:off x="711101" y="2936677"/>
-            <a:ext cx="5570169" cy="634901"/>
-          </a:xfrm>
-          <a:prstGeom prst="rect">
-            <a:avLst/>
-          </a:prstGeom>
-          <a:noFill/>
-          <a:ln/>
-        </p:spPr>
-        <p:txBody>
-          <a:bodyPr wrap="square" lIns="0" tIns="0" rIns="0" bIns="0" rtlCol="0" anchor="t"/>
-          <a:lstStyle/>
-          <a:p>
-            <a:pPr algn="l" indent="0" marL="0">
-              <a:lnSpc>
-                <a:spcPts val="2500"/>
-              </a:lnSpc>
-              <a:buNone/>
-            </a:pPr>
-            <a:r>
-              <a:rPr lang="en-US" sz="1900" dirty="0">
-                <a:solidFill>
-                  <a:srgbClr val="59636E"/>
-                </a:solidFill>
-                <a:latin typeface="Arial" pitchFamily="34" charset="0"/>
-                <a:ea typeface="Arial" pitchFamily="34" charset="-122"/>
-                <a:cs typeface="Arial" pitchFamily="34" charset="-120"/>
-              </a:rPr>
-              <a:t>Check your tools, then seed your fork with the practice work for later chapters.</a:t>
-            </a:r>
-            <a:endParaRPr lang="en-US" sz="1900" dirty="0"/>
           </a:p>
         </p:txBody>
       </p:sp>
@@ -10703,7 +10661,7 @@
         </p:nvSpPr>
         <p:spPr>
           <a:xfrm>
-            <a:off x="711101" y="1571774"/>
+            <a:off x="711101" y="1937534"/>
             <a:ext cx="5570169" cy="209550"/>
           </a:xfrm>
           <a:prstGeom prst="rect">
@@ -10742,7 +10700,7 @@
         </p:nvSpPr>
         <p:spPr>
           <a:xfrm>
-            <a:off x="711101" y="1882825"/>
+            <a:off x="711101" y="2248585"/>
             <a:ext cx="5570169" cy="584150"/>
           </a:xfrm>
           <a:prstGeom prst="rect">
@@ -10787,7 +10745,7 @@
         </p:nvSpPr>
         <p:spPr>
           <a:xfrm>
-            <a:off x="711101" y="2670125"/>
+            <a:off x="711101" y="3035885"/>
             <a:ext cx="609600" cy="63401"/>
           </a:xfrm>
           <a:prstGeom prst="roundRect">
@@ -10808,48 +10766,6 @@
               <a:buNone/>
             </a:pPr>
             <a:endParaRPr lang="en-US" dirty="0"/>
-          </a:p>
-        </p:txBody>
-      </p:sp>
-      <p:sp>
-        <p:nvSpPr>
-          <p:cNvPr id="12" name="Text 8"/>
-          <p:cNvSpPr/>
-          <p:nvPr/>
-        </p:nvSpPr>
-        <p:spPr>
-          <a:xfrm>
-            <a:off x="711101" y="2936677"/>
-            <a:ext cx="5570169" cy="634901"/>
-          </a:xfrm>
-          <a:prstGeom prst="rect">
-            <a:avLst/>
-          </a:prstGeom>
-          <a:noFill/>
-          <a:ln/>
-        </p:spPr>
-        <p:txBody>
-          <a:bodyPr wrap="square" lIns="0" tIns="0" rIns="0" bIns="0" rtlCol="0" anchor="t"/>
-          <a:lstStyle/>
-          <a:p>
-            <a:pPr algn="l" indent="0" marL="0">
-              <a:lnSpc>
-                <a:spcPts val="2500"/>
-              </a:lnSpc>
-              <a:buNone/>
-            </a:pPr>
-            <a:r>
-              <a:rPr lang="en-US" sz="1900" dirty="0">
-                <a:solidFill>
-                  <a:srgbClr val="59636E"/>
-                </a:solidFill>
-                <a:latin typeface="Arial" pitchFamily="34" charset="0"/>
-                <a:ea typeface="Arial" pitchFamily="34" charset="-122"/>
-                <a:cs typeface="Arial" pitchFamily="34" charset="-120"/>
-              </a:rPr>
-              <a:t>Download the desktop app and sign in with your GitHub account.</a:t>
-            </a:r>
-            <a:endParaRPr lang="en-US" sz="1900" dirty="0"/>
           </a:p>
         </p:txBody>
       </p:sp>
@@ -11999,7 +11915,7 @@
         </p:nvSpPr>
         <p:spPr>
           <a:xfrm>
-            <a:off x="711101" y="1279773"/>
+            <a:off x="711101" y="1645533"/>
             <a:ext cx="5570169" cy="209550"/>
           </a:xfrm>
           <a:prstGeom prst="rect">
@@ -12038,7 +11954,7 @@
         </p:nvSpPr>
         <p:spPr>
           <a:xfrm>
-            <a:off x="711101" y="1590824"/>
+            <a:off x="711101" y="1956584"/>
             <a:ext cx="5570169" cy="1168301"/>
           </a:xfrm>
           <a:prstGeom prst="rect">
@@ -12083,7 +11999,7 @@
         </p:nvSpPr>
         <p:spPr>
           <a:xfrm>
-            <a:off x="711101" y="2962275"/>
+            <a:off x="711101" y="3328035"/>
             <a:ext cx="609600" cy="63401"/>
           </a:xfrm>
           <a:prstGeom prst="roundRect">
@@ -12104,48 +12020,6 @@
               <a:buNone/>
             </a:pPr>
             <a:endParaRPr lang="en-US" dirty="0"/>
-          </a:p>
-        </p:txBody>
-      </p:sp>
-      <p:sp>
-        <p:nvSpPr>
-          <p:cNvPr id="12" name="Text 8"/>
-          <p:cNvSpPr/>
-          <p:nvPr/>
-        </p:nvSpPr>
-        <p:spPr>
-          <a:xfrm>
-            <a:off x="711101" y="3228826"/>
-            <a:ext cx="5570169" cy="634901"/>
-          </a:xfrm>
-          <a:prstGeom prst="rect">
-            <a:avLst/>
-          </a:prstGeom>
-          <a:noFill/>
-          <a:ln/>
-        </p:spPr>
-        <p:txBody>
-          <a:bodyPr wrap="square" lIns="0" tIns="0" rIns="0" bIns="0" rtlCol="0" anchor="t"/>
-          <a:lstStyle/>
-          <a:p>
-            <a:pPr algn="l" indent="0" marL="0">
-              <a:lnSpc>
-                <a:spcPts val="2500"/>
-              </a:lnSpc>
-              <a:buNone/>
-            </a:pPr>
-            <a:r>
-              <a:rPr lang="en-US" sz="1900" dirty="0">
-                <a:solidFill>
-                  <a:srgbClr val="59636E"/>
-                </a:solidFill>
-                <a:latin typeface="Arial" pitchFamily="34" charset="0"/>
-                <a:ea typeface="Arial" pitchFamily="34" charset="-122"/>
-                <a:cs typeface="Arial" pitchFamily="34" charset="-120"/>
-              </a:rPr>
-              <a:t>Fork the course, add it to the app as a project, and start your first project session.</a:t>
-            </a:r>
-            <a:endParaRPr lang="en-US" sz="1900" dirty="0"/>
           </a:p>
         </p:txBody>
       </p:sp>

--- a/slides/00-setup.pptx
+++ b/slides/00-setup.pptx
@@ -12886,8 +12886,8 @@
         </ns0:nvSpPr>
         <ns0:spPr>
           <ns1:xfrm>
-            <ns1:off x="4320927" y="1579811"/>
-            <ns1:ext cx="4311551" cy="3037731"/>
+            <ns1:off x="4325112" y="2295144"/>
+            <ns1:ext cx="4306824" cy="1581963"/>
           </ns1:xfrm>
           <ns1:prstGeom prst="roundRect">
             <ns1:avLst>
@@ -12923,22 +12923,22 @@
       </ns0:sp>
       <ns0:pic>
         <ns0:nvPicPr>
-          <ns0:cNvPr id="22" name="Image 2" descr="Sessions menu with callouts for + and Add GitHub repository"/>
+          <ns0:cNvPr id="22" name="Image 2" descr="Sessions plus button and the complete menu, with Add GitHub repository highlighted. Callouts 1 and 2 remain visible."/>
           <ns0:cNvPicPr>
             <ns1:picLocks noChangeAspect="1"/>
           </ns0:cNvPicPr>
           <ns0:nvPr/>
         </ns0:nvPicPr>
         <ns0:blipFill>
-          <ns1:blip ns3:embed="rId4"/>
+          <ns1:blip ns3:embed="rId7"/>
           <ns1:stretch>
             <ns1:fillRect/>
           </ns1:stretch>
         </ns0:blipFill>
         <ns0:spPr>
           <ns1:xfrm>
-            <ns1:off x="4368552" y="1627436"/>
-            <ns1:ext cx="4216301" cy="2942481"/>
+            <ns1:off x="4370832" y="2340864"/>
+            <ns1:ext cx="4215384" cy="1490523"/>
           </ns1:xfrm>
           <ns1:prstGeom prst="rect">
             <ns1:avLst/>
